--- a/docs/pptx/auc3/ritu-auc3-linsubhr-ratio-anemia2.pptx
+++ b/docs/pptx/auc3/ritu-auc3-linsubhr-ratio-anemia2.pptx
@@ -2443,7 +2443,7 @@
           </p:nvSpPr>
           <p:spPr>
             <a:xfrm>
-              <a:off x="1463479" y="2073503"/>
+              <a:off x="1464298" y="2073503"/>
               <a:ext cx="0" cy="3649639"/>
             </a:xfrm>
             <a:custGeom>
@@ -2486,7 +2486,7 @@
           </p:nvSpPr>
           <p:spPr>
             <a:xfrm>
-              <a:off x="3267849" y="2073503"/>
+              <a:off x="3268188" y="2073503"/>
               <a:ext cx="0" cy="3649639"/>
             </a:xfrm>
             <a:custGeom>
@@ -2529,7 +2529,7 @@
           </p:nvSpPr>
           <p:spPr>
             <a:xfrm>
-              <a:off x="5072218" y="2073503"/>
+              <a:off x="5072078" y="2073503"/>
               <a:ext cx="0" cy="3649639"/>
             </a:xfrm>
             <a:custGeom>
@@ -2572,7 +2572,7 @@
           </p:nvSpPr>
           <p:spPr>
             <a:xfrm>
-              <a:off x="6876587" y="2073503"/>
+              <a:off x="6875967" y="2073503"/>
               <a:ext cx="0" cy="3649639"/>
             </a:xfrm>
             <a:custGeom>
@@ -2830,7 +2830,7 @@
           </p:nvSpPr>
           <p:spPr>
             <a:xfrm>
-              <a:off x="2365664" y="2073503"/>
+              <a:off x="2366243" y="2073503"/>
               <a:ext cx="0" cy="3649639"/>
             </a:xfrm>
             <a:custGeom>
@@ -2873,7 +2873,7 @@
           </p:nvSpPr>
           <p:spPr>
             <a:xfrm>
-              <a:off x="4170033" y="2073503"/>
+              <a:off x="4170133" y="2073503"/>
               <a:ext cx="0" cy="3649639"/>
             </a:xfrm>
             <a:custGeom>
@@ -2916,7 +2916,7 @@
           </p:nvSpPr>
           <p:spPr>
             <a:xfrm>
-              <a:off x="5974402" y="2073503"/>
+              <a:off x="5974022" y="2073503"/>
               <a:ext cx="0" cy="3649639"/>
             </a:xfrm>
             <a:custGeom>
@@ -2959,7 +2959,7 @@
           </p:nvSpPr>
           <p:spPr>
             <a:xfrm>
-              <a:off x="7778772" y="2073503"/>
+              <a:off x="7777912" y="2073503"/>
               <a:ext cx="0" cy="3649639"/>
             </a:xfrm>
             <a:custGeom>
@@ -3002,612 +3002,612 @@
           </p:nvSpPr>
           <p:spPr>
             <a:xfrm>
-              <a:off x="1172049" y="2315111"/>
-              <a:ext cx="7090630" cy="3113849"/>
+              <a:off x="1172049" y="2297107"/>
+              <a:ext cx="7090630" cy="3132094"/>
             </a:xfrm>
             <a:custGeom>
               <a:avLst/>
               <a:pathLst>
-                <a:path w="7090630" h="3113849">
+                <a:path w="7090630" h="3132094">
                   <a:moveTo>
                     <a:pt x="0" y="0"/>
                   </a:moveTo>
                   <a:lnTo>
-                    <a:pt x="71622" y="104062"/>
-                  </a:lnTo>
-                  <a:lnTo>
-                    <a:pt x="143245" y="204784"/>
-                  </a:lnTo>
-                  <a:lnTo>
-                    <a:pt x="214867" y="302274"/>
-                  </a:lnTo>
-                  <a:lnTo>
-                    <a:pt x="286490" y="396634"/>
-                  </a:lnTo>
-                  <a:lnTo>
-                    <a:pt x="358112" y="487966"/>
-                  </a:lnTo>
-                  <a:lnTo>
-                    <a:pt x="429735" y="576366"/>
-                  </a:lnTo>
-                  <a:lnTo>
-                    <a:pt x="501357" y="661929"/>
-                  </a:lnTo>
-                  <a:lnTo>
-                    <a:pt x="572980" y="744745"/>
-                  </a:lnTo>
-                  <a:lnTo>
-                    <a:pt x="644602" y="824904"/>
-                  </a:lnTo>
-                  <a:lnTo>
-                    <a:pt x="716225" y="902489"/>
-                  </a:lnTo>
-                  <a:lnTo>
-                    <a:pt x="787847" y="977584"/>
-                  </a:lnTo>
-                  <a:lnTo>
-                    <a:pt x="859470" y="1050269"/>
-                  </a:lnTo>
-                  <a:lnTo>
-                    <a:pt x="931092" y="1120621"/>
-                  </a:lnTo>
-                  <a:lnTo>
-                    <a:pt x="1002715" y="1188715"/>
-                  </a:lnTo>
-                  <a:lnTo>
-                    <a:pt x="1074337" y="1254624"/>
-                  </a:lnTo>
-                  <a:lnTo>
-                    <a:pt x="1145960" y="1318417"/>
-                  </a:lnTo>
-                  <a:lnTo>
-                    <a:pt x="1217582" y="1380162"/>
-                  </a:lnTo>
-                  <a:lnTo>
-                    <a:pt x="1289205" y="1439926"/>
-                  </a:lnTo>
-                  <a:lnTo>
-                    <a:pt x="1360827" y="1497771"/>
-                  </a:lnTo>
-                  <a:lnTo>
-                    <a:pt x="1432450" y="1553760"/>
-                  </a:lnTo>
-                  <a:lnTo>
-                    <a:pt x="1504073" y="1607951"/>
-                  </a:lnTo>
-                  <a:lnTo>
-                    <a:pt x="1575695" y="1660403"/>
-                  </a:lnTo>
-                  <a:lnTo>
-                    <a:pt x="1647318" y="1711172"/>
-                  </a:lnTo>
-                  <a:lnTo>
-                    <a:pt x="1718940" y="1760311"/>
-                  </a:lnTo>
-                  <a:lnTo>
-                    <a:pt x="1790563" y="1807873"/>
-                  </a:lnTo>
-                  <a:lnTo>
-                    <a:pt x="1862185" y="1853909"/>
-                  </a:lnTo>
-                  <a:lnTo>
-                    <a:pt x="1933808" y="1898466"/>
-                  </a:lnTo>
-                  <a:lnTo>
-                    <a:pt x="2005430" y="1941594"/>
-                  </a:lnTo>
-                  <a:lnTo>
-                    <a:pt x="2077053" y="1983337"/>
-                  </a:lnTo>
-                  <a:lnTo>
-                    <a:pt x="2148675" y="2023741"/>
-                  </a:lnTo>
-                  <a:lnTo>
-                    <a:pt x="2220298" y="2062847"/>
-                  </a:lnTo>
-                  <a:lnTo>
-                    <a:pt x="2291920" y="2100699"/>
-                  </a:lnTo>
-                  <a:lnTo>
-                    <a:pt x="2363543" y="2137336"/>
-                  </a:lnTo>
-                  <a:lnTo>
-                    <a:pt x="2435165" y="2172796"/>
-                  </a:lnTo>
-                  <a:lnTo>
-                    <a:pt x="2506788" y="2207119"/>
-                  </a:lnTo>
-                  <a:lnTo>
-                    <a:pt x="2578410" y="2240339"/>
-                  </a:lnTo>
-                  <a:lnTo>
-                    <a:pt x="2650033" y="2272494"/>
-                  </a:lnTo>
-                  <a:lnTo>
-                    <a:pt x="2721655" y="2303617"/>
-                  </a:lnTo>
-                  <a:lnTo>
-                    <a:pt x="2793278" y="2333740"/>
-                  </a:lnTo>
-                  <a:lnTo>
-                    <a:pt x="2864901" y="2362897"/>
-                  </a:lnTo>
-                  <a:lnTo>
-                    <a:pt x="2936523" y="2391118"/>
-                  </a:lnTo>
-                  <a:lnTo>
-                    <a:pt x="3008146" y="2412673"/>
-                  </a:lnTo>
-                  <a:lnTo>
-                    <a:pt x="3079768" y="2412665"/>
-                  </a:lnTo>
-                  <a:lnTo>
-                    <a:pt x="3151391" y="2412657"/>
-                  </a:lnTo>
-                  <a:lnTo>
-                    <a:pt x="3223013" y="2412649"/>
-                  </a:lnTo>
-                  <a:lnTo>
-                    <a:pt x="3294636" y="2412641"/>
-                  </a:lnTo>
-                  <a:lnTo>
-                    <a:pt x="3366258" y="2412634"/>
-                  </a:lnTo>
-                  <a:lnTo>
-                    <a:pt x="3437881" y="2412626"/>
-                  </a:lnTo>
-                  <a:lnTo>
-                    <a:pt x="3509503" y="2412618"/>
-                  </a:lnTo>
-                  <a:lnTo>
-                    <a:pt x="3581126" y="2412610"/>
-                  </a:lnTo>
-                  <a:lnTo>
-                    <a:pt x="3652748" y="2412602"/>
-                  </a:lnTo>
-                  <a:lnTo>
-                    <a:pt x="3724371" y="2412594"/>
-                  </a:lnTo>
-                  <a:lnTo>
-                    <a:pt x="3795993" y="2412586"/>
-                  </a:lnTo>
-                  <a:lnTo>
-                    <a:pt x="3867616" y="2412579"/>
-                  </a:lnTo>
-                  <a:lnTo>
-                    <a:pt x="3939238" y="2412571"/>
-                  </a:lnTo>
-                  <a:lnTo>
-                    <a:pt x="4010861" y="2412563"/>
-                  </a:lnTo>
-                  <a:lnTo>
-                    <a:pt x="4082483" y="2412555"/>
-                  </a:lnTo>
-                  <a:lnTo>
-                    <a:pt x="4154106" y="2412547"/>
-                  </a:lnTo>
-                  <a:lnTo>
-                    <a:pt x="4225729" y="2412539"/>
-                  </a:lnTo>
-                  <a:lnTo>
-                    <a:pt x="4297351" y="2412531"/>
-                  </a:lnTo>
-                  <a:lnTo>
-                    <a:pt x="4368974" y="2412524"/>
-                  </a:lnTo>
-                  <a:lnTo>
-                    <a:pt x="4440596" y="2412516"/>
-                  </a:lnTo>
-                  <a:lnTo>
-                    <a:pt x="4512219" y="2412508"/>
-                  </a:lnTo>
-                  <a:lnTo>
-                    <a:pt x="4583841" y="2412500"/>
-                  </a:lnTo>
-                  <a:lnTo>
-                    <a:pt x="4655464" y="2412492"/>
-                  </a:lnTo>
-                  <a:lnTo>
-                    <a:pt x="4727086" y="2412484"/>
-                  </a:lnTo>
-                  <a:lnTo>
-                    <a:pt x="4798709" y="2412476"/>
-                  </a:lnTo>
-                  <a:lnTo>
-                    <a:pt x="4870331" y="2412469"/>
-                  </a:lnTo>
-                  <a:lnTo>
-                    <a:pt x="4941954" y="2412461"/>
-                  </a:lnTo>
-                  <a:lnTo>
-                    <a:pt x="5013576" y="2412453"/>
-                  </a:lnTo>
-                  <a:lnTo>
-                    <a:pt x="5085199" y="2412445"/>
-                  </a:lnTo>
-                  <a:lnTo>
-                    <a:pt x="5156821" y="2412437"/>
-                  </a:lnTo>
-                  <a:lnTo>
-                    <a:pt x="5228444" y="2412429"/>
-                  </a:lnTo>
-                  <a:lnTo>
-                    <a:pt x="5300066" y="2412422"/>
-                  </a:lnTo>
-                  <a:lnTo>
-                    <a:pt x="5371689" y="2412414"/>
-                  </a:lnTo>
-                  <a:lnTo>
-                    <a:pt x="5443311" y="2412406"/>
-                  </a:lnTo>
-                  <a:lnTo>
-                    <a:pt x="5514934" y="2412398"/>
-                  </a:lnTo>
-                  <a:lnTo>
-                    <a:pt x="5586557" y="2412390"/>
-                  </a:lnTo>
-                  <a:lnTo>
-                    <a:pt x="5658179" y="2412382"/>
-                  </a:lnTo>
-                  <a:lnTo>
-                    <a:pt x="5729802" y="2412374"/>
-                  </a:lnTo>
-                  <a:lnTo>
-                    <a:pt x="5801424" y="2412367"/>
-                  </a:lnTo>
-                  <a:lnTo>
-                    <a:pt x="5873047" y="2412359"/>
-                  </a:lnTo>
-                  <a:lnTo>
-                    <a:pt x="5944669" y="2412351"/>
-                  </a:lnTo>
-                  <a:lnTo>
-                    <a:pt x="6016292" y="2412343"/>
-                  </a:lnTo>
-                  <a:lnTo>
-                    <a:pt x="6087914" y="2412335"/>
-                  </a:lnTo>
-                  <a:lnTo>
-                    <a:pt x="6159537" y="2412327"/>
-                  </a:lnTo>
-                  <a:lnTo>
-                    <a:pt x="6231159" y="2412319"/>
-                  </a:lnTo>
-                  <a:lnTo>
-                    <a:pt x="6302782" y="2412312"/>
-                  </a:lnTo>
-                  <a:lnTo>
-                    <a:pt x="6374404" y="2412304"/>
-                  </a:lnTo>
-                  <a:lnTo>
-                    <a:pt x="6446027" y="2412296"/>
-                  </a:lnTo>
-                  <a:lnTo>
-                    <a:pt x="6517649" y="2412288"/>
-                  </a:lnTo>
-                  <a:lnTo>
-                    <a:pt x="6589272" y="2412280"/>
-                  </a:lnTo>
-                  <a:lnTo>
-                    <a:pt x="6660894" y="2412272"/>
-                  </a:lnTo>
-                  <a:lnTo>
-                    <a:pt x="6732517" y="2412264"/>
-                  </a:lnTo>
-                  <a:lnTo>
-                    <a:pt x="6804139" y="2412257"/>
-                  </a:lnTo>
-                  <a:lnTo>
-                    <a:pt x="6875762" y="2412249"/>
-                  </a:lnTo>
-                  <a:lnTo>
-                    <a:pt x="6947385" y="2412241"/>
-                  </a:lnTo>
-                  <a:lnTo>
-                    <a:pt x="7019007" y="2412233"/>
-                  </a:lnTo>
-                  <a:lnTo>
-                    <a:pt x="7090630" y="2412225"/>
-                  </a:lnTo>
-                  <a:lnTo>
-                    <a:pt x="7090630" y="3113849"/>
-                  </a:lnTo>
-                  <a:lnTo>
-                    <a:pt x="7019007" y="3109594"/>
-                  </a:lnTo>
-                  <a:lnTo>
-                    <a:pt x="6947385" y="3105199"/>
-                  </a:lnTo>
-                  <a:lnTo>
-                    <a:pt x="6875762" y="3100658"/>
-                  </a:lnTo>
-                  <a:lnTo>
-                    <a:pt x="6804139" y="3095966"/>
-                  </a:lnTo>
-                  <a:lnTo>
-                    <a:pt x="6732517" y="3091119"/>
-                  </a:lnTo>
-                  <a:lnTo>
-                    <a:pt x="6660894" y="3086111"/>
-                  </a:lnTo>
-                  <a:lnTo>
-                    <a:pt x="6589272" y="3080937"/>
-                  </a:lnTo>
-                  <a:lnTo>
-                    <a:pt x="6517649" y="3075591"/>
-                  </a:lnTo>
-                  <a:lnTo>
-                    <a:pt x="6446027" y="3070069"/>
-                  </a:lnTo>
-                  <a:lnTo>
-                    <a:pt x="6374404" y="3064363"/>
-                  </a:lnTo>
-                  <a:lnTo>
-                    <a:pt x="6302782" y="3058467"/>
-                  </a:lnTo>
-                  <a:lnTo>
-                    <a:pt x="6231159" y="3052377"/>
-                  </a:lnTo>
-                  <a:lnTo>
-                    <a:pt x="6159537" y="3046084"/>
-                  </a:lnTo>
-                  <a:lnTo>
-                    <a:pt x="6087914" y="3039582"/>
-                  </a:lnTo>
-                  <a:lnTo>
-                    <a:pt x="6016292" y="3032865"/>
-                  </a:lnTo>
-                  <a:lnTo>
-                    <a:pt x="5944669" y="3025926"/>
-                  </a:lnTo>
-                  <a:lnTo>
-                    <a:pt x="5873047" y="3018756"/>
-                  </a:lnTo>
-                  <a:lnTo>
-                    <a:pt x="5801424" y="3011348"/>
-                  </a:lnTo>
-                  <a:lnTo>
-                    <a:pt x="5729802" y="3003695"/>
-                  </a:lnTo>
-                  <a:lnTo>
-                    <a:pt x="5658179" y="2995788"/>
-                  </a:lnTo>
-                  <a:lnTo>
-                    <a:pt x="5586557" y="2987619"/>
-                  </a:lnTo>
-                  <a:lnTo>
-                    <a:pt x="5514934" y="2979179"/>
-                  </a:lnTo>
-                  <a:lnTo>
-                    <a:pt x="5443311" y="2970459"/>
-                  </a:lnTo>
-                  <a:lnTo>
-                    <a:pt x="5371689" y="2961449"/>
-                  </a:lnTo>
-                  <a:lnTo>
-                    <a:pt x="5300066" y="2952141"/>
-                  </a:lnTo>
-                  <a:lnTo>
-                    <a:pt x="5228444" y="2942525"/>
-                  </a:lnTo>
-                  <a:lnTo>
-                    <a:pt x="5156821" y="2932589"/>
-                  </a:lnTo>
-                  <a:lnTo>
-                    <a:pt x="5085199" y="2922324"/>
-                  </a:lnTo>
-                  <a:lnTo>
-                    <a:pt x="5013576" y="2911719"/>
-                  </a:lnTo>
-                  <a:lnTo>
-                    <a:pt x="4941954" y="2900762"/>
-                  </a:lnTo>
-                  <a:lnTo>
-                    <a:pt x="4870331" y="2889441"/>
-                  </a:lnTo>
-                  <a:lnTo>
-                    <a:pt x="4798709" y="2877745"/>
-                  </a:lnTo>
-                  <a:lnTo>
-                    <a:pt x="4727086" y="2865662"/>
-                  </a:lnTo>
-                  <a:lnTo>
-                    <a:pt x="4655464" y="2853177"/>
-                  </a:lnTo>
-                  <a:lnTo>
-                    <a:pt x="4583841" y="2840279"/>
-                  </a:lnTo>
-                  <a:lnTo>
-                    <a:pt x="4512219" y="2826953"/>
-                  </a:lnTo>
-                  <a:lnTo>
-                    <a:pt x="4440596" y="2813185"/>
-                  </a:lnTo>
-                  <a:lnTo>
-                    <a:pt x="4368974" y="2798960"/>
-                  </a:lnTo>
-                  <a:lnTo>
-                    <a:pt x="4297351" y="2784264"/>
-                  </a:lnTo>
-                  <a:lnTo>
-                    <a:pt x="4225729" y="2769080"/>
-                  </a:lnTo>
-                  <a:lnTo>
-                    <a:pt x="4154106" y="2753393"/>
-                  </a:lnTo>
-                  <a:lnTo>
-                    <a:pt x="4082483" y="2737185"/>
-                  </a:lnTo>
-                  <a:lnTo>
-                    <a:pt x="4010861" y="2720441"/>
-                  </a:lnTo>
-                  <a:lnTo>
-                    <a:pt x="3939238" y="2703141"/>
-                  </a:lnTo>
-                  <a:lnTo>
-                    <a:pt x="3867616" y="2685267"/>
-                  </a:lnTo>
-                  <a:lnTo>
-                    <a:pt x="3795993" y="2666800"/>
-                  </a:lnTo>
-                  <a:lnTo>
-                    <a:pt x="3724371" y="2647721"/>
-                  </a:lnTo>
-                  <a:lnTo>
-                    <a:pt x="3652748" y="2628010"/>
-                  </a:lnTo>
-                  <a:lnTo>
-                    <a:pt x="3581126" y="2607645"/>
-                  </a:lnTo>
-                  <a:lnTo>
-                    <a:pt x="3509503" y="2586604"/>
-                  </a:lnTo>
-                  <a:lnTo>
-                    <a:pt x="3437881" y="2564866"/>
-                  </a:lnTo>
-                  <a:lnTo>
-                    <a:pt x="3366258" y="2542407"/>
-                  </a:lnTo>
-                  <a:lnTo>
-                    <a:pt x="3294636" y="2519203"/>
-                  </a:lnTo>
-                  <a:lnTo>
-                    <a:pt x="3223013" y="2495229"/>
-                  </a:lnTo>
-                  <a:lnTo>
-                    <a:pt x="3151391" y="2470461"/>
-                  </a:lnTo>
-                  <a:lnTo>
-                    <a:pt x="3079768" y="2444871"/>
-                  </a:lnTo>
-                  <a:lnTo>
-                    <a:pt x="3008146" y="2418433"/>
-                  </a:lnTo>
-                  <a:lnTo>
-                    <a:pt x="2936523" y="2412681"/>
-                  </a:lnTo>
-                  <a:lnTo>
-                    <a:pt x="2864901" y="2412688"/>
-                  </a:lnTo>
-                  <a:lnTo>
-                    <a:pt x="2793278" y="2412696"/>
-                  </a:lnTo>
-                  <a:lnTo>
-                    <a:pt x="2721655" y="2412704"/>
-                  </a:lnTo>
-                  <a:lnTo>
-                    <a:pt x="2650033" y="2412712"/>
-                  </a:lnTo>
-                  <a:lnTo>
-                    <a:pt x="2578410" y="2412720"/>
-                  </a:lnTo>
-                  <a:lnTo>
-                    <a:pt x="2506788" y="2412728"/>
-                  </a:lnTo>
-                  <a:lnTo>
-                    <a:pt x="2435165" y="2412736"/>
-                  </a:lnTo>
-                  <a:lnTo>
-                    <a:pt x="2363543" y="2412743"/>
-                  </a:lnTo>
-                  <a:lnTo>
-                    <a:pt x="2291920" y="2412751"/>
-                  </a:lnTo>
-                  <a:lnTo>
-                    <a:pt x="2220298" y="2412759"/>
-                  </a:lnTo>
-                  <a:lnTo>
-                    <a:pt x="2148675" y="2412767"/>
-                  </a:lnTo>
-                  <a:lnTo>
-                    <a:pt x="2077053" y="2412775"/>
-                  </a:lnTo>
-                  <a:lnTo>
-                    <a:pt x="2005430" y="2412783"/>
-                  </a:lnTo>
-                  <a:lnTo>
-                    <a:pt x="1933808" y="2412790"/>
-                  </a:lnTo>
-                  <a:lnTo>
-                    <a:pt x="1862185" y="2412798"/>
-                  </a:lnTo>
-                  <a:lnTo>
-                    <a:pt x="1790563" y="2412806"/>
-                  </a:lnTo>
-                  <a:lnTo>
-                    <a:pt x="1718940" y="2412814"/>
-                  </a:lnTo>
-                  <a:lnTo>
-                    <a:pt x="1647318" y="2412822"/>
-                  </a:lnTo>
-                  <a:lnTo>
-                    <a:pt x="1575695" y="2412830"/>
-                  </a:lnTo>
-                  <a:lnTo>
-                    <a:pt x="1504073" y="2412838"/>
-                  </a:lnTo>
-                  <a:lnTo>
-                    <a:pt x="1432450" y="2412845"/>
-                  </a:lnTo>
-                  <a:lnTo>
-                    <a:pt x="1360827" y="2412853"/>
-                  </a:lnTo>
-                  <a:lnTo>
-                    <a:pt x="1289205" y="2412861"/>
-                  </a:lnTo>
-                  <a:lnTo>
-                    <a:pt x="1217582" y="2412869"/>
-                  </a:lnTo>
-                  <a:lnTo>
-                    <a:pt x="1145960" y="2412877"/>
-                  </a:lnTo>
-                  <a:lnTo>
-                    <a:pt x="1074337" y="2412885"/>
-                  </a:lnTo>
-                  <a:lnTo>
-                    <a:pt x="1002715" y="2412893"/>
-                  </a:lnTo>
-                  <a:lnTo>
-                    <a:pt x="931092" y="2412900"/>
-                  </a:lnTo>
-                  <a:lnTo>
-                    <a:pt x="859470" y="2412908"/>
-                  </a:lnTo>
-                  <a:lnTo>
-                    <a:pt x="787847" y="2412916"/>
-                  </a:lnTo>
-                  <a:lnTo>
-                    <a:pt x="716225" y="2412924"/>
-                  </a:lnTo>
-                  <a:lnTo>
-                    <a:pt x="644602" y="2412932"/>
-                  </a:lnTo>
-                  <a:lnTo>
-                    <a:pt x="572980" y="2412940"/>
-                  </a:lnTo>
-                  <a:lnTo>
-                    <a:pt x="501357" y="2412947"/>
-                  </a:lnTo>
-                  <a:lnTo>
-                    <a:pt x="429735" y="2412955"/>
-                  </a:lnTo>
-                  <a:lnTo>
-                    <a:pt x="358112" y="2412963"/>
-                  </a:lnTo>
-                  <a:lnTo>
-                    <a:pt x="286490" y="2412971"/>
-                  </a:lnTo>
-                  <a:lnTo>
-                    <a:pt x="214867" y="2412979"/>
-                  </a:lnTo>
-                  <a:lnTo>
-                    <a:pt x="143245" y="2412987"/>
-                  </a:lnTo>
-                  <a:lnTo>
-                    <a:pt x="71622" y="2412995"/>
-                  </a:lnTo>
-                  <a:lnTo>
-                    <a:pt x="0" y="2413002"/>
+                    <a:pt x="71622" y="104876"/>
+                  </a:lnTo>
+                  <a:lnTo>
+                    <a:pt x="143245" y="206379"/>
+                  </a:lnTo>
+                  <a:lnTo>
+                    <a:pt x="214867" y="304617"/>
+                  </a:lnTo>
+                  <a:lnTo>
+                    <a:pt x="286490" y="399694"/>
+                  </a:lnTo>
+                  <a:lnTo>
+                    <a:pt x="358112" y="491713"/>
+                  </a:lnTo>
+                  <a:lnTo>
+                    <a:pt x="429735" y="580772"/>
+                  </a:lnTo>
+                  <a:lnTo>
+                    <a:pt x="501357" y="666965"/>
+                  </a:lnTo>
+                  <a:lnTo>
+                    <a:pt x="572980" y="750386"/>
+                  </a:lnTo>
+                  <a:lnTo>
+                    <a:pt x="644602" y="831123"/>
+                  </a:lnTo>
+                  <a:lnTo>
+                    <a:pt x="716225" y="909263"/>
+                  </a:lnTo>
+                  <a:lnTo>
+                    <a:pt x="787847" y="984890"/>
+                  </a:lnTo>
+                  <a:lnTo>
+                    <a:pt x="859470" y="1058083"/>
+                  </a:lnTo>
+                  <a:lnTo>
+                    <a:pt x="931092" y="1128922"/>
+                  </a:lnTo>
+                  <a:lnTo>
+                    <a:pt x="1002715" y="1197482"/>
+                  </a:lnTo>
+                  <a:lnTo>
+                    <a:pt x="1074337" y="1263836"/>
+                  </a:lnTo>
+                  <a:lnTo>
+                    <a:pt x="1145960" y="1328056"/>
+                  </a:lnTo>
+                  <a:lnTo>
+                    <a:pt x="1217582" y="1390210"/>
+                  </a:lnTo>
+                  <a:lnTo>
+                    <a:pt x="1289205" y="1450365"/>
+                  </a:lnTo>
+                  <a:lnTo>
+                    <a:pt x="1360827" y="1508584"/>
+                  </a:lnTo>
+                  <a:lnTo>
+                    <a:pt x="1432450" y="1564931"/>
+                  </a:lnTo>
+                  <a:lnTo>
+                    <a:pt x="1504073" y="1619464"/>
+                  </a:lnTo>
+                  <a:lnTo>
+                    <a:pt x="1575695" y="1672244"/>
+                  </a:lnTo>
+                  <a:lnTo>
+                    <a:pt x="1647318" y="1723326"/>
+                  </a:lnTo>
+                  <a:lnTo>
+                    <a:pt x="1718940" y="1772764"/>
+                  </a:lnTo>
+                  <a:lnTo>
+                    <a:pt x="1790563" y="1820612"/>
+                  </a:lnTo>
+                  <a:lnTo>
+                    <a:pt x="1862185" y="1866921"/>
+                  </a:lnTo>
+                  <a:lnTo>
+                    <a:pt x="1933808" y="1911740"/>
+                  </a:lnTo>
+                  <a:lnTo>
+                    <a:pt x="2005430" y="1955117"/>
+                  </a:lnTo>
+                  <a:lnTo>
+                    <a:pt x="2077053" y="1997099"/>
+                  </a:lnTo>
+                  <a:lnTo>
+                    <a:pt x="2148675" y="2037730"/>
+                  </a:lnTo>
+                  <a:lnTo>
+                    <a:pt x="2220298" y="2077054"/>
+                  </a:lnTo>
+                  <a:lnTo>
+                    <a:pt x="2291920" y="2115114"/>
+                  </a:lnTo>
+                  <a:lnTo>
+                    <a:pt x="2363543" y="2151948"/>
+                  </a:lnTo>
+                  <a:lnTo>
+                    <a:pt x="2435165" y="2187598"/>
+                  </a:lnTo>
+                  <a:lnTo>
+                    <a:pt x="2506788" y="2222101"/>
+                  </a:lnTo>
+                  <a:lnTo>
+                    <a:pt x="2578410" y="2255495"/>
+                  </a:lnTo>
+                  <a:lnTo>
+                    <a:pt x="2650033" y="2287813"/>
+                  </a:lnTo>
+                  <a:lnTo>
+                    <a:pt x="2721655" y="2319093"/>
+                  </a:lnTo>
+                  <a:lnTo>
+                    <a:pt x="2793278" y="2349366"/>
+                  </a:lnTo>
+                  <a:lnTo>
+                    <a:pt x="2864901" y="2378665"/>
+                  </a:lnTo>
+                  <a:lnTo>
+                    <a:pt x="2936523" y="2407021"/>
+                  </a:lnTo>
+                  <a:lnTo>
+                    <a:pt x="3008146" y="2430650"/>
+                  </a:lnTo>
+                  <a:lnTo>
+                    <a:pt x="3079768" y="2430445"/>
+                  </a:lnTo>
+                  <a:lnTo>
+                    <a:pt x="3151391" y="2430240"/>
+                  </a:lnTo>
+                  <a:lnTo>
+                    <a:pt x="3223013" y="2430036"/>
+                  </a:lnTo>
+                  <a:lnTo>
+                    <a:pt x="3294636" y="2429831"/>
+                  </a:lnTo>
+                  <a:lnTo>
+                    <a:pt x="3366258" y="2429626"/>
+                  </a:lnTo>
+                  <a:lnTo>
+                    <a:pt x="3437881" y="2429421"/>
+                  </a:lnTo>
+                  <a:lnTo>
+                    <a:pt x="3509503" y="2429216"/>
+                  </a:lnTo>
+                  <a:lnTo>
+                    <a:pt x="3581126" y="2429011"/>
+                  </a:lnTo>
+                  <a:lnTo>
+                    <a:pt x="3652748" y="2428806"/>
+                  </a:lnTo>
+                  <a:lnTo>
+                    <a:pt x="3724371" y="2428601"/>
+                  </a:lnTo>
+                  <a:lnTo>
+                    <a:pt x="3795993" y="2428396"/>
+                  </a:lnTo>
+                  <a:lnTo>
+                    <a:pt x="3867616" y="2428191"/>
+                  </a:lnTo>
+                  <a:lnTo>
+                    <a:pt x="3939238" y="2427986"/>
+                  </a:lnTo>
+                  <a:lnTo>
+                    <a:pt x="4010861" y="2427781"/>
+                  </a:lnTo>
+                  <a:lnTo>
+                    <a:pt x="4082483" y="2427575"/>
+                  </a:lnTo>
+                  <a:lnTo>
+                    <a:pt x="4154106" y="2427370"/>
+                  </a:lnTo>
+                  <a:lnTo>
+                    <a:pt x="4225729" y="2427165"/>
+                  </a:lnTo>
+                  <a:lnTo>
+                    <a:pt x="4297351" y="2426959"/>
+                  </a:lnTo>
+                  <a:lnTo>
+                    <a:pt x="4368974" y="2426754"/>
+                  </a:lnTo>
+                  <a:lnTo>
+                    <a:pt x="4440596" y="2426548"/>
+                  </a:lnTo>
+                  <a:lnTo>
+                    <a:pt x="4512219" y="2426343"/>
+                  </a:lnTo>
+                  <a:lnTo>
+                    <a:pt x="4583841" y="2426137"/>
+                  </a:lnTo>
+                  <a:lnTo>
+                    <a:pt x="4655464" y="2425931"/>
+                  </a:lnTo>
+                  <a:lnTo>
+                    <a:pt x="4727086" y="2425725"/>
+                  </a:lnTo>
+                  <a:lnTo>
+                    <a:pt x="4798709" y="2425520"/>
+                  </a:lnTo>
+                  <a:lnTo>
+                    <a:pt x="4870331" y="2425314"/>
+                  </a:lnTo>
+                  <a:lnTo>
+                    <a:pt x="4941954" y="2425108"/>
+                  </a:lnTo>
+                  <a:lnTo>
+                    <a:pt x="5013576" y="2424902"/>
+                  </a:lnTo>
+                  <a:lnTo>
+                    <a:pt x="5085199" y="2424696"/>
+                  </a:lnTo>
+                  <a:lnTo>
+                    <a:pt x="5156821" y="2424490"/>
+                  </a:lnTo>
+                  <a:lnTo>
+                    <a:pt x="5228444" y="2424284"/>
+                  </a:lnTo>
+                  <a:lnTo>
+                    <a:pt x="5300066" y="2424077"/>
+                  </a:lnTo>
+                  <a:lnTo>
+                    <a:pt x="5371689" y="2423871"/>
+                  </a:lnTo>
+                  <a:lnTo>
+                    <a:pt x="5443311" y="2423665"/>
+                  </a:lnTo>
+                  <a:lnTo>
+                    <a:pt x="5514934" y="2423459"/>
+                  </a:lnTo>
+                  <a:lnTo>
+                    <a:pt x="5586557" y="2423252"/>
+                  </a:lnTo>
+                  <a:lnTo>
+                    <a:pt x="5658179" y="2423046"/>
+                  </a:lnTo>
+                  <a:lnTo>
+                    <a:pt x="5729802" y="2422839"/>
+                  </a:lnTo>
+                  <a:lnTo>
+                    <a:pt x="5801424" y="2422633"/>
+                  </a:lnTo>
+                  <a:lnTo>
+                    <a:pt x="5873047" y="2422426"/>
+                  </a:lnTo>
+                  <a:lnTo>
+                    <a:pt x="5944669" y="2422220"/>
+                  </a:lnTo>
+                  <a:lnTo>
+                    <a:pt x="6016292" y="2422013"/>
+                  </a:lnTo>
+                  <a:lnTo>
+                    <a:pt x="6087914" y="2421806"/>
+                  </a:lnTo>
+                  <a:lnTo>
+                    <a:pt x="6159537" y="2421599"/>
+                  </a:lnTo>
+                  <a:lnTo>
+                    <a:pt x="6231159" y="2421393"/>
+                  </a:lnTo>
+                  <a:lnTo>
+                    <a:pt x="6302782" y="2421186"/>
+                  </a:lnTo>
+                  <a:lnTo>
+                    <a:pt x="6374404" y="2420979"/>
+                  </a:lnTo>
+                  <a:lnTo>
+                    <a:pt x="6446027" y="2420772"/>
+                  </a:lnTo>
+                  <a:lnTo>
+                    <a:pt x="6517649" y="2420565"/>
+                  </a:lnTo>
+                  <a:lnTo>
+                    <a:pt x="6589272" y="2420358"/>
+                  </a:lnTo>
+                  <a:lnTo>
+                    <a:pt x="6660894" y="2420151"/>
+                  </a:lnTo>
+                  <a:lnTo>
+                    <a:pt x="6732517" y="2419943"/>
+                  </a:lnTo>
+                  <a:lnTo>
+                    <a:pt x="6804139" y="2419736"/>
+                  </a:lnTo>
+                  <a:lnTo>
+                    <a:pt x="6875762" y="2419529"/>
+                  </a:lnTo>
+                  <a:lnTo>
+                    <a:pt x="6947385" y="2419321"/>
+                  </a:lnTo>
+                  <a:lnTo>
+                    <a:pt x="7019007" y="2419114"/>
+                  </a:lnTo>
+                  <a:lnTo>
+                    <a:pt x="7090630" y="2418907"/>
+                  </a:lnTo>
+                  <a:lnTo>
+                    <a:pt x="7090630" y="3132094"/>
+                  </a:lnTo>
+                  <a:lnTo>
+                    <a:pt x="7019007" y="3127838"/>
+                  </a:lnTo>
+                  <a:lnTo>
+                    <a:pt x="6947385" y="3123440"/>
+                  </a:lnTo>
+                  <a:lnTo>
+                    <a:pt x="6875762" y="3118896"/>
+                  </a:lnTo>
+                  <a:lnTo>
+                    <a:pt x="6804139" y="3114201"/>
+                  </a:lnTo>
+                  <a:lnTo>
+                    <a:pt x="6732517" y="3109350"/>
+                  </a:lnTo>
+                  <a:lnTo>
+                    <a:pt x="6660894" y="3104338"/>
+                  </a:lnTo>
+                  <a:lnTo>
+                    <a:pt x="6589272" y="3099160"/>
+                  </a:lnTo>
+                  <a:lnTo>
+                    <a:pt x="6517649" y="3093809"/>
+                  </a:lnTo>
+                  <a:lnTo>
+                    <a:pt x="6446027" y="3088280"/>
+                  </a:lnTo>
+                  <a:lnTo>
+                    <a:pt x="6374404" y="3082568"/>
+                  </a:lnTo>
+                  <a:lnTo>
+                    <a:pt x="6302782" y="3076665"/>
+                  </a:lnTo>
+                  <a:lnTo>
+                    <a:pt x="6231159" y="3070567"/>
+                  </a:lnTo>
+                  <a:lnTo>
+                    <a:pt x="6159537" y="3064266"/>
+                  </a:lnTo>
+                  <a:lnTo>
+                    <a:pt x="6087914" y="3057755"/>
+                  </a:lnTo>
+                  <a:lnTo>
+                    <a:pt x="6016292" y="3051028"/>
+                  </a:lnTo>
+                  <a:lnTo>
+                    <a:pt x="5944669" y="3044077"/>
+                  </a:lnTo>
+                  <a:lnTo>
+                    <a:pt x="5873047" y="3036896"/>
+                  </a:lnTo>
+                  <a:lnTo>
+                    <a:pt x="5801424" y="3029475"/>
+                  </a:lnTo>
+                  <a:lnTo>
+                    <a:pt x="5729802" y="3021808"/>
+                  </a:lnTo>
+                  <a:lnTo>
+                    <a:pt x="5658179" y="3013886"/>
+                  </a:lnTo>
+                  <a:lnTo>
+                    <a:pt x="5586557" y="3005701"/>
+                  </a:lnTo>
+                  <a:lnTo>
+                    <a:pt x="5514934" y="2997244"/>
+                  </a:lnTo>
+                  <a:lnTo>
+                    <a:pt x="5443311" y="2988505"/>
+                  </a:lnTo>
+                  <a:lnTo>
+                    <a:pt x="5371689" y="2979477"/>
+                  </a:lnTo>
+                  <a:lnTo>
+                    <a:pt x="5300066" y="2970148"/>
+                  </a:lnTo>
+                  <a:lnTo>
+                    <a:pt x="5228444" y="2960509"/>
+                  </a:lnTo>
+                  <a:lnTo>
+                    <a:pt x="5156821" y="2950549"/>
+                  </a:lnTo>
+                  <a:lnTo>
+                    <a:pt x="5085199" y="2940259"/>
+                  </a:lnTo>
+                  <a:lnTo>
+                    <a:pt x="5013576" y="2929626"/>
+                  </a:lnTo>
+                  <a:lnTo>
+                    <a:pt x="4941954" y="2918640"/>
+                  </a:lnTo>
+                  <a:lnTo>
+                    <a:pt x="4870331" y="2907289"/>
+                  </a:lnTo>
+                  <a:lnTo>
+                    <a:pt x="4798709" y="2895561"/>
+                  </a:lnTo>
+                  <a:lnTo>
+                    <a:pt x="4727086" y="2883443"/>
+                  </a:lnTo>
+                  <a:lnTo>
+                    <a:pt x="4655464" y="2870922"/>
+                  </a:lnTo>
+                  <a:lnTo>
+                    <a:pt x="4583841" y="2857985"/>
+                  </a:lnTo>
+                  <a:lnTo>
+                    <a:pt x="4512219" y="2844618"/>
+                  </a:lnTo>
+                  <a:lnTo>
+                    <a:pt x="4440596" y="2830806"/>
+                  </a:lnTo>
+                  <a:lnTo>
+                    <a:pt x="4368974" y="2816536"/>
+                  </a:lnTo>
+                  <a:lnTo>
+                    <a:pt x="4297351" y="2801791"/>
+                  </a:lnTo>
+                  <a:lnTo>
+                    <a:pt x="4225729" y="2786556"/>
+                  </a:lnTo>
+                  <a:lnTo>
+                    <a:pt x="4154106" y="2770814"/>
+                  </a:lnTo>
+                  <a:lnTo>
+                    <a:pt x="4082483" y="2754550"/>
+                  </a:lnTo>
+                  <a:lnTo>
+                    <a:pt x="4010861" y="2737745"/>
+                  </a:lnTo>
+                  <a:lnTo>
+                    <a:pt x="3939238" y="2720381"/>
+                  </a:lnTo>
+                  <a:lnTo>
+                    <a:pt x="3867616" y="2702440"/>
+                  </a:lnTo>
+                  <a:lnTo>
+                    <a:pt x="3795993" y="2683903"/>
+                  </a:lnTo>
+                  <a:lnTo>
+                    <a:pt x="3724371" y="2664749"/>
+                  </a:lnTo>
+                  <a:lnTo>
+                    <a:pt x="3652748" y="2644959"/>
+                  </a:lnTo>
+                  <a:lnTo>
+                    <a:pt x="3581126" y="2624511"/>
+                  </a:lnTo>
+                  <a:lnTo>
+                    <a:pt x="3509503" y="2603384"/>
+                  </a:lnTo>
+                  <a:lnTo>
+                    <a:pt x="3437881" y="2581554"/>
+                  </a:lnTo>
+                  <a:lnTo>
+                    <a:pt x="3366258" y="2558999"/>
+                  </a:lnTo>
+                  <a:lnTo>
+                    <a:pt x="3294636" y="2535694"/>
+                  </a:lnTo>
+                  <a:lnTo>
+                    <a:pt x="3223013" y="2511614"/>
+                  </a:lnTo>
+                  <a:lnTo>
+                    <a:pt x="3151391" y="2486734"/>
+                  </a:lnTo>
+                  <a:lnTo>
+                    <a:pt x="3079768" y="2461027"/>
+                  </a:lnTo>
+                  <a:lnTo>
+                    <a:pt x="3008146" y="2434466"/>
+                  </a:lnTo>
+                  <a:lnTo>
+                    <a:pt x="2936523" y="2430854"/>
+                  </a:lnTo>
+                  <a:lnTo>
+                    <a:pt x="2864901" y="2431059"/>
+                  </a:lnTo>
+                  <a:lnTo>
+                    <a:pt x="2793278" y="2431263"/>
+                  </a:lnTo>
+                  <a:lnTo>
+                    <a:pt x="2721655" y="2431468"/>
+                  </a:lnTo>
+                  <a:lnTo>
+                    <a:pt x="2650033" y="2431672"/>
+                  </a:lnTo>
+                  <a:lnTo>
+                    <a:pt x="2578410" y="2431876"/>
+                  </a:lnTo>
+                  <a:lnTo>
+                    <a:pt x="2506788" y="2432080"/>
+                  </a:lnTo>
+                  <a:lnTo>
+                    <a:pt x="2435165" y="2432285"/>
+                  </a:lnTo>
+                  <a:lnTo>
+                    <a:pt x="2363543" y="2432489"/>
+                  </a:lnTo>
+                  <a:lnTo>
+                    <a:pt x="2291920" y="2432693"/>
+                  </a:lnTo>
+                  <a:lnTo>
+                    <a:pt x="2220298" y="2432897"/>
+                  </a:lnTo>
+                  <a:lnTo>
+                    <a:pt x="2148675" y="2433101"/>
+                  </a:lnTo>
+                  <a:lnTo>
+                    <a:pt x="2077053" y="2433305"/>
+                  </a:lnTo>
+                  <a:lnTo>
+                    <a:pt x="2005430" y="2433509"/>
+                  </a:lnTo>
+                  <a:lnTo>
+                    <a:pt x="1933808" y="2433713"/>
+                  </a:lnTo>
+                  <a:lnTo>
+                    <a:pt x="1862185" y="2433916"/>
+                  </a:lnTo>
+                  <a:lnTo>
+                    <a:pt x="1790563" y="2434120"/>
+                  </a:lnTo>
+                  <a:lnTo>
+                    <a:pt x="1718940" y="2434324"/>
+                  </a:lnTo>
+                  <a:lnTo>
+                    <a:pt x="1647318" y="2434528"/>
+                  </a:lnTo>
+                  <a:lnTo>
+                    <a:pt x="1575695" y="2434731"/>
+                  </a:lnTo>
+                  <a:lnTo>
+                    <a:pt x="1504073" y="2434935"/>
+                  </a:lnTo>
+                  <a:lnTo>
+                    <a:pt x="1432450" y="2435138"/>
+                  </a:lnTo>
+                  <a:lnTo>
+                    <a:pt x="1360827" y="2435342"/>
+                  </a:lnTo>
+                  <a:lnTo>
+                    <a:pt x="1289205" y="2435545"/>
+                  </a:lnTo>
+                  <a:lnTo>
+                    <a:pt x="1217582" y="2435748"/>
+                  </a:lnTo>
+                  <a:lnTo>
+                    <a:pt x="1145960" y="2435952"/>
+                  </a:lnTo>
+                  <a:lnTo>
+                    <a:pt x="1074337" y="2436155"/>
+                  </a:lnTo>
+                  <a:lnTo>
+                    <a:pt x="1002715" y="2436358"/>
+                  </a:lnTo>
+                  <a:lnTo>
+                    <a:pt x="931092" y="2436561"/>
+                  </a:lnTo>
+                  <a:lnTo>
+                    <a:pt x="859470" y="2436764"/>
+                  </a:lnTo>
+                  <a:lnTo>
+                    <a:pt x="787847" y="2436967"/>
+                  </a:lnTo>
+                  <a:lnTo>
+                    <a:pt x="716225" y="2437170"/>
+                  </a:lnTo>
+                  <a:lnTo>
+                    <a:pt x="644602" y="2437373"/>
+                  </a:lnTo>
+                  <a:lnTo>
+                    <a:pt x="572980" y="2437576"/>
+                  </a:lnTo>
+                  <a:lnTo>
+                    <a:pt x="501357" y="2437779"/>
+                  </a:lnTo>
+                  <a:lnTo>
+                    <a:pt x="429735" y="2437982"/>
+                  </a:lnTo>
+                  <a:lnTo>
+                    <a:pt x="358112" y="2438184"/>
+                  </a:lnTo>
+                  <a:lnTo>
+                    <a:pt x="286490" y="2438387"/>
+                  </a:lnTo>
+                  <a:lnTo>
+                    <a:pt x="214867" y="2438590"/>
+                  </a:lnTo>
+                  <a:lnTo>
+                    <a:pt x="143245" y="2438792"/>
+                  </a:lnTo>
+                  <a:lnTo>
+                    <a:pt x="71622" y="2438995"/>
+                  </a:lnTo>
+                  <a:lnTo>
+                    <a:pt x="0" y="2439197"/>
                   </a:lnTo>
                   <a:close/>
                 </a:path>
@@ -3633,312 +3633,312 @@
           </p:nvSpPr>
           <p:spPr>
             <a:xfrm>
-              <a:off x="1172049" y="2315111"/>
-              <a:ext cx="7090630" cy="2412673"/>
+              <a:off x="1172049" y="2297107"/>
+              <a:ext cx="7090630" cy="2430650"/>
             </a:xfrm>
             <a:custGeom>
               <a:avLst/>
               <a:pathLst>
-                <a:path w="7090630" h="2412673">
+                <a:path w="7090630" h="2430650">
                   <a:moveTo>
                     <a:pt x="0" y="0"/>
                   </a:moveTo>
                   <a:lnTo>
-                    <a:pt x="71622" y="104062"/>
-                  </a:lnTo>
-                  <a:lnTo>
-                    <a:pt x="143245" y="204784"/>
-                  </a:lnTo>
-                  <a:lnTo>
-                    <a:pt x="214867" y="302274"/>
-                  </a:lnTo>
-                  <a:lnTo>
-                    <a:pt x="286490" y="396634"/>
-                  </a:lnTo>
-                  <a:lnTo>
-                    <a:pt x="358112" y="487966"/>
-                  </a:lnTo>
-                  <a:lnTo>
-                    <a:pt x="429735" y="576366"/>
-                  </a:lnTo>
-                  <a:lnTo>
-                    <a:pt x="501357" y="661929"/>
-                  </a:lnTo>
-                  <a:lnTo>
-                    <a:pt x="572980" y="744745"/>
-                  </a:lnTo>
-                  <a:lnTo>
-                    <a:pt x="644602" y="824904"/>
-                  </a:lnTo>
-                  <a:lnTo>
-                    <a:pt x="716225" y="902489"/>
-                  </a:lnTo>
-                  <a:lnTo>
-                    <a:pt x="787847" y="977584"/>
-                  </a:lnTo>
-                  <a:lnTo>
-                    <a:pt x="859470" y="1050269"/>
-                  </a:lnTo>
-                  <a:lnTo>
-                    <a:pt x="931092" y="1120621"/>
-                  </a:lnTo>
-                  <a:lnTo>
-                    <a:pt x="1002715" y="1188715"/>
-                  </a:lnTo>
-                  <a:lnTo>
-                    <a:pt x="1074337" y="1254624"/>
-                  </a:lnTo>
-                  <a:lnTo>
-                    <a:pt x="1145960" y="1318417"/>
-                  </a:lnTo>
-                  <a:lnTo>
-                    <a:pt x="1217582" y="1380162"/>
-                  </a:lnTo>
-                  <a:lnTo>
-                    <a:pt x="1289205" y="1439926"/>
-                  </a:lnTo>
-                  <a:lnTo>
-                    <a:pt x="1360827" y="1497771"/>
-                  </a:lnTo>
-                  <a:lnTo>
-                    <a:pt x="1432450" y="1553760"/>
-                  </a:lnTo>
-                  <a:lnTo>
-                    <a:pt x="1504073" y="1607951"/>
-                  </a:lnTo>
-                  <a:lnTo>
-                    <a:pt x="1575695" y="1660403"/>
-                  </a:lnTo>
-                  <a:lnTo>
-                    <a:pt x="1647318" y="1711172"/>
-                  </a:lnTo>
-                  <a:lnTo>
-                    <a:pt x="1718940" y="1760311"/>
-                  </a:lnTo>
-                  <a:lnTo>
-                    <a:pt x="1790563" y="1807873"/>
-                  </a:lnTo>
-                  <a:lnTo>
-                    <a:pt x="1862185" y="1853909"/>
-                  </a:lnTo>
-                  <a:lnTo>
-                    <a:pt x="1933808" y="1898466"/>
-                  </a:lnTo>
-                  <a:lnTo>
-                    <a:pt x="2005430" y="1941594"/>
-                  </a:lnTo>
-                  <a:lnTo>
-                    <a:pt x="2077053" y="1983337"/>
-                  </a:lnTo>
-                  <a:lnTo>
-                    <a:pt x="2148675" y="2023741"/>
-                  </a:lnTo>
-                  <a:lnTo>
-                    <a:pt x="2220298" y="2062847"/>
-                  </a:lnTo>
-                  <a:lnTo>
-                    <a:pt x="2291920" y="2100699"/>
-                  </a:lnTo>
-                  <a:lnTo>
-                    <a:pt x="2363543" y="2137336"/>
-                  </a:lnTo>
-                  <a:lnTo>
-                    <a:pt x="2435165" y="2172796"/>
-                  </a:lnTo>
-                  <a:lnTo>
-                    <a:pt x="2506788" y="2207119"/>
-                  </a:lnTo>
-                  <a:lnTo>
-                    <a:pt x="2578410" y="2240339"/>
-                  </a:lnTo>
-                  <a:lnTo>
-                    <a:pt x="2650033" y="2272494"/>
-                  </a:lnTo>
-                  <a:lnTo>
-                    <a:pt x="2721655" y="2303617"/>
-                  </a:lnTo>
-                  <a:lnTo>
-                    <a:pt x="2793278" y="2333740"/>
-                  </a:lnTo>
-                  <a:lnTo>
-                    <a:pt x="2864901" y="2362897"/>
-                  </a:lnTo>
-                  <a:lnTo>
-                    <a:pt x="2936523" y="2391118"/>
-                  </a:lnTo>
-                  <a:lnTo>
-                    <a:pt x="3008146" y="2412673"/>
-                  </a:lnTo>
-                  <a:lnTo>
-                    <a:pt x="3079768" y="2412665"/>
-                  </a:lnTo>
-                  <a:lnTo>
-                    <a:pt x="3151391" y="2412657"/>
-                  </a:lnTo>
-                  <a:lnTo>
-                    <a:pt x="3223013" y="2412649"/>
-                  </a:lnTo>
-                  <a:lnTo>
-                    <a:pt x="3294636" y="2412641"/>
-                  </a:lnTo>
-                  <a:lnTo>
-                    <a:pt x="3366258" y="2412634"/>
-                  </a:lnTo>
-                  <a:lnTo>
-                    <a:pt x="3437881" y="2412626"/>
-                  </a:lnTo>
-                  <a:lnTo>
-                    <a:pt x="3509503" y="2412618"/>
-                  </a:lnTo>
-                  <a:lnTo>
-                    <a:pt x="3581126" y="2412610"/>
-                  </a:lnTo>
-                  <a:lnTo>
-                    <a:pt x="3652748" y="2412602"/>
-                  </a:lnTo>
-                  <a:lnTo>
-                    <a:pt x="3724371" y="2412594"/>
-                  </a:lnTo>
-                  <a:lnTo>
-                    <a:pt x="3795993" y="2412586"/>
-                  </a:lnTo>
-                  <a:lnTo>
-                    <a:pt x="3867616" y="2412579"/>
-                  </a:lnTo>
-                  <a:lnTo>
-                    <a:pt x="3939238" y="2412571"/>
-                  </a:lnTo>
-                  <a:lnTo>
-                    <a:pt x="4010861" y="2412563"/>
-                  </a:lnTo>
-                  <a:lnTo>
-                    <a:pt x="4082483" y="2412555"/>
-                  </a:lnTo>
-                  <a:lnTo>
-                    <a:pt x="4154106" y="2412547"/>
-                  </a:lnTo>
-                  <a:lnTo>
-                    <a:pt x="4225729" y="2412539"/>
-                  </a:lnTo>
-                  <a:lnTo>
-                    <a:pt x="4297351" y="2412531"/>
-                  </a:lnTo>
-                  <a:lnTo>
-                    <a:pt x="4368974" y="2412524"/>
-                  </a:lnTo>
-                  <a:lnTo>
-                    <a:pt x="4440596" y="2412516"/>
-                  </a:lnTo>
-                  <a:lnTo>
-                    <a:pt x="4512219" y="2412508"/>
-                  </a:lnTo>
-                  <a:lnTo>
-                    <a:pt x="4583841" y="2412500"/>
-                  </a:lnTo>
-                  <a:lnTo>
-                    <a:pt x="4655464" y="2412492"/>
-                  </a:lnTo>
-                  <a:lnTo>
-                    <a:pt x="4727086" y="2412484"/>
-                  </a:lnTo>
-                  <a:lnTo>
-                    <a:pt x="4798709" y="2412476"/>
-                  </a:lnTo>
-                  <a:lnTo>
-                    <a:pt x="4870331" y="2412469"/>
-                  </a:lnTo>
-                  <a:lnTo>
-                    <a:pt x="4941954" y="2412461"/>
-                  </a:lnTo>
-                  <a:lnTo>
-                    <a:pt x="5013576" y="2412453"/>
-                  </a:lnTo>
-                  <a:lnTo>
-                    <a:pt x="5085199" y="2412445"/>
-                  </a:lnTo>
-                  <a:lnTo>
-                    <a:pt x="5156821" y="2412437"/>
-                  </a:lnTo>
-                  <a:lnTo>
-                    <a:pt x="5228444" y="2412429"/>
-                  </a:lnTo>
-                  <a:lnTo>
-                    <a:pt x="5300066" y="2412422"/>
-                  </a:lnTo>
-                  <a:lnTo>
-                    <a:pt x="5371689" y="2412414"/>
-                  </a:lnTo>
-                  <a:lnTo>
-                    <a:pt x="5443311" y="2412406"/>
-                  </a:lnTo>
-                  <a:lnTo>
-                    <a:pt x="5514934" y="2412398"/>
-                  </a:lnTo>
-                  <a:lnTo>
-                    <a:pt x="5586557" y="2412390"/>
-                  </a:lnTo>
-                  <a:lnTo>
-                    <a:pt x="5658179" y="2412382"/>
-                  </a:lnTo>
-                  <a:lnTo>
-                    <a:pt x="5729802" y="2412374"/>
-                  </a:lnTo>
-                  <a:lnTo>
-                    <a:pt x="5801424" y="2412367"/>
-                  </a:lnTo>
-                  <a:lnTo>
-                    <a:pt x="5873047" y="2412359"/>
-                  </a:lnTo>
-                  <a:lnTo>
-                    <a:pt x="5944669" y="2412351"/>
-                  </a:lnTo>
-                  <a:lnTo>
-                    <a:pt x="6016292" y="2412343"/>
-                  </a:lnTo>
-                  <a:lnTo>
-                    <a:pt x="6087914" y="2412335"/>
-                  </a:lnTo>
-                  <a:lnTo>
-                    <a:pt x="6159537" y="2412327"/>
-                  </a:lnTo>
-                  <a:lnTo>
-                    <a:pt x="6231159" y="2412319"/>
-                  </a:lnTo>
-                  <a:lnTo>
-                    <a:pt x="6302782" y="2412312"/>
-                  </a:lnTo>
-                  <a:lnTo>
-                    <a:pt x="6374404" y="2412304"/>
-                  </a:lnTo>
-                  <a:lnTo>
-                    <a:pt x="6446027" y="2412296"/>
-                  </a:lnTo>
-                  <a:lnTo>
-                    <a:pt x="6517649" y="2412288"/>
-                  </a:lnTo>
-                  <a:lnTo>
-                    <a:pt x="6589272" y="2412280"/>
-                  </a:lnTo>
-                  <a:lnTo>
-                    <a:pt x="6660894" y="2412272"/>
-                  </a:lnTo>
-                  <a:lnTo>
-                    <a:pt x="6732517" y="2412264"/>
-                  </a:lnTo>
-                  <a:lnTo>
-                    <a:pt x="6804139" y="2412257"/>
-                  </a:lnTo>
-                  <a:lnTo>
-                    <a:pt x="6875762" y="2412249"/>
-                  </a:lnTo>
-                  <a:lnTo>
-                    <a:pt x="6947385" y="2412241"/>
-                  </a:lnTo>
-                  <a:lnTo>
-                    <a:pt x="7019007" y="2412233"/>
-                  </a:lnTo>
-                  <a:lnTo>
-                    <a:pt x="7090630" y="2412225"/>
+                    <a:pt x="71622" y="104876"/>
+                  </a:lnTo>
+                  <a:lnTo>
+                    <a:pt x="143245" y="206379"/>
+                  </a:lnTo>
+                  <a:lnTo>
+                    <a:pt x="214867" y="304617"/>
+                  </a:lnTo>
+                  <a:lnTo>
+                    <a:pt x="286490" y="399694"/>
+                  </a:lnTo>
+                  <a:lnTo>
+                    <a:pt x="358112" y="491713"/>
+                  </a:lnTo>
+                  <a:lnTo>
+                    <a:pt x="429735" y="580772"/>
+                  </a:lnTo>
+                  <a:lnTo>
+                    <a:pt x="501357" y="666965"/>
+                  </a:lnTo>
+                  <a:lnTo>
+                    <a:pt x="572980" y="750386"/>
+                  </a:lnTo>
+                  <a:lnTo>
+                    <a:pt x="644602" y="831123"/>
+                  </a:lnTo>
+                  <a:lnTo>
+                    <a:pt x="716225" y="909263"/>
+                  </a:lnTo>
+                  <a:lnTo>
+                    <a:pt x="787847" y="984890"/>
+                  </a:lnTo>
+                  <a:lnTo>
+                    <a:pt x="859470" y="1058083"/>
+                  </a:lnTo>
+                  <a:lnTo>
+                    <a:pt x="931092" y="1128922"/>
+                  </a:lnTo>
+                  <a:lnTo>
+                    <a:pt x="1002715" y="1197482"/>
+                  </a:lnTo>
+                  <a:lnTo>
+                    <a:pt x="1074337" y="1263836"/>
+                  </a:lnTo>
+                  <a:lnTo>
+                    <a:pt x="1145960" y="1328056"/>
+                  </a:lnTo>
+                  <a:lnTo>
+                    <a:pt x="1217582" y="1390210"/>
+                  </a:lnTo>
+                  <a:lnTo>
+                    <a:pt x="1289205" y="1450365"/>
+                  </a:lnTo>
+                  <a:lnTo>
+                    <a:pt x="1360827" y="1508584"/>
+                  </a:lnTo>
+                  <a:lnTo>
+                    <a:pt x="1432450" y="1564931"/>
+                  </a:lnTo>
+                  <a:lnTo>
+                    <a:pt x="1504073" y="1619464"/>
+                  </a:lnTo>
+                  <a:lnTo>
+                    <a:pt x="1575695" y="1672244"/>
+                  </a:lnTo>
+                  <a:lnTo>
+                    <a:pt x="1647318" y="1723326"/>
+                  </a:lnTo>
+                  <a:lnTo>
+                    <a:pt x="1718940" y="1772764"/>
+                  </a:lnTo>
+                  <a:lnTo>
+                    <a:pt x="1790563" y="1820612"/>
+                  </a:lnTo>
+                  <a:lnTo>
+                    <a:pt x="1862185" y="1866921"/>
+                  </a:lnTo>
+                  <a:lnTo>
+                    <a:pt x="1933808" y="1911740"/>
+                  </a:lnTo>
+                  <a:lnTo>
+                    <a:pt x="2005430" y="1955117"/>
+                  </a:lnTo>
+                  <a:lnTo>
+                    <a:pt x="2077053" y="1997099"/>
+                  </a:lnTo>
+                  <a:lnTo>
+                    <a:pt x="2148675" y="2037730"/>
+                  </a:lnTo>
+                  <a:lnTo>
+                    <a:pt x="2220298" y="2077054"/>
+                  </a:lnTo>
+                  <a:lnTo>
+                    <a:pt x="2291920" y="2115114"/>
+                  </a:lnTo>
+                  <a:lnTo>
+                    <a:pt x="2363543" y="2151948"/>
+                  </a:lnTo>
+                  <a:lnTo>
+                    <a:pt x="2435165" y="2187598"/>
+                  </a:lnTo>
+                  <a:lnTo>
+                    <a:pt x="2506788" y="2222101"/>
+                  </a:lnTo>
+                  <a:lnTo>
+                    <a:pt x="2578410" y="2255495"/>
+                  </a:lnTo>
+                  <a:lnTo>
+                    <a:pt x="2650033" y="2287813"/>
+                  </a:lnTo>
+                  <a:lnTo>
+                    <a:pt x="2721655" y="2319093"/>
+                  </a:lnTo>
+                  <a:lnTo>
+                    <a:pt x="2793278" y="2349366"/>
+                  </a:lnTo>
+                  <a:lnTo>
+                    <a:pt x="2864901" y="2378665"/>
+                  </a:lnTo>
+                  <a:lnTo>
+                    <a:pt x="2936523" y="2407021"/>
+                  </a:lnTo>
+                  <a:lnTo>
+                    <a:pt x="3008146" y="2430650"/>
+                  </a:lnTo>
+                  <a:lnTo>
+                    <a:pt x="3079768" y="2430445"/>
+                  </a:lnTo>
+                  <a:lnTo>
+                    <a:pt x="3151391" y="2430240"/>
+                  </a:lnTo>
+                  <a:lnTo>
+                    <a:pt x="3223013" y="2430036"/>
+                  </a:lnTo>
+                  <a:lnTo>
+                    <a:pt x="3294636" y="2429831"/>
+                  </a:lnTo>
+                  <a:lnTo>
+                    <a:pt x="3366258" y="2429626"/>
+                  </a:lnTo>
+                  <a:lnTo>
+                    <a:pt x="3437881" y="2429421"/>
+                  </a:lnTo>
+                  <a:lnTo>
+                    <a:pt x="3509503" y="2429216"/>
+                  </a:lnTo>
+                  <a:lnTo>
+                    <a:pt x="3581126" y="2429011"/>
+                  </a:lnTo>
+                  <a:lnTo>
+                    <a:pt x="3652748" y="2428806"/>
+                  </a:lnTo>
+                  <a:lnTo>
+                    <a:pt x="3724371" y="2428601"/>
+                  </a:lnTo>
+                  <a:lnTo>
+                    <a:pt x="3795993" y="2428396"/>
+                  </a:lnTo>
+                  <a:lnTo>
+                    <a:pt x="3867616" y="2428191"/>
+                  </a:lnTo>
+                  <a:lnTo>
+                    <a:pt x="3939238" y="2427986"/>
+                  </a:lnTo>
+                  <a:lnTo>
+                    <a:pt x="4010861" y="2427781"/>
+                  </a:lnTo>
+                  <a:lnTo>
+                    <a:pt x="4082483" y="2427575"/>
+                  </a:lnTo>
+                  <a:lnTo>
+                    <a:pt x="4154106" y="2427370"/>
+                  </a:lnTo>
+                  <a:lnTo>
+                    <a:pt x="4225729" y="2427165"/>
+                  </a:lnTo>
+                  <a:lnTo>
+                    <a:pt x="4297351" y="2426959"/>
+                  </a:lnTo>
+                  <a:lnTo>
+                    <a:pt x="4368974" y="2426754"/>
+                  </a:lnTo>
+                  <a:lnTo>
+                    <a:pt x="4440596" y="2426548"/>
+                  </a:lnTo>
+                  <a:lnTo>
+                    <a:pt x="4512219" y="2426343"/>
+                  </a:lnTo>
+                  <a:lnTo>
+                    <a:pt x="4583841" y="2426137"/>
+                  </a:lnTo>
+                  <a:lnTo>
+                    <a:pt x="4655464" y="2425931"/>
+                  </a:lnTo>
+                  <a:lnTo>
+                    <a:pt x="4727086" y="2425725"/>
+                  </a:lnTo>
+                  <a:lnTo>
+                    <a:pt x="4798709" y="2425520"/>
+                  </a:lnTo>
+                  <a:lnTo>
+                    <a:pt x="4870331" y="2425314"/>
+                  </a:lnTo>
+                  <a:lnTo>
+                    <a:pt x="4941954" y="2425108"/>
+                  </a:lnTo>
+                  <a:lnTo>
+                    <a:pt x="5013576" y="2424902"/>
+                  </a:lnTo>
+                  <a:lnTo>
+                    <a:pt x="5085199" y="2424696"/>
+                  </a:lnTo>
+                  <a:lnTo>
+                    <a:pt x="5156821" y="2424490"/>
+                  </a:lnTo>
+                  <a:lnTo>
+                    <a:pt x="5228444" y="2424284"/>
+                  </a:lnTo>
+                  <a:lnTo>
+                    <a:pt x="5300066" y="2424077"/>
+                  </a:lnTo>
+                  <a:lnTo>
+                    <a:pt x="5371689" y="2423871"/>
+                  </a:lnTo>
+                  <a:lnTo>
+                    <a:pt x="5443311" y="2423665"/>
+                  </a:lnTo>
+                  <a:lnTo>
+                    <a:pt x="5514934" y="2423459"/>
+                  </a:lnTo>
+                  <a:lnTo>
+                    <a:pt x="5586557" y="2423252"/>
+                  </a:lnTo>
+                  <a:lnTo>
+                    <a:pt x="5658179" y="2423046"/>
+                  </a:lnTo>
+                  <a:lnTo>
+                    <a:pt x="5729802" y="2422839"/>
+                  </a:lnTo>
+                  <a:lnTo>
+                    <a:pt x="5801424" y="2422633"/>
+                  </a:lnTo>
+                  <a:lnTo>
+                    <a:pt x="5873047" y="2422426"/>
+                  </a:lnTo>
+                  <a:lnTo>
+                    <a:pt x="5944669" y="2422220"/>
+                  </a:lnTo>
+                  <a:lnTo>
+                    <a:pt x="6016292" y="2422013"/>
+                  </a:lnTo>
+                  <a:lnTo>
+                    <a:pt x="6087914" y="2421806"/>
+                  </a:lnTo>
+                  <a:lnTo>
+                    <a:pt x="6159537" y="2421599"/>
+                  </a:lnTo>
+                  <a:lnTo>
+                    <a:pt x="6231159" y="2421393"/>
+                  </a:lnTo>
+                  <a:lnTo>
+                    <a:pt x="6302782" y="2421186"/>
+                  </a:lnTo>
+                  <a:lnTo>
+                    <a:pt x="6374404" y="2420979"/>
+                  </a:lnTo>
+                  <a:lnTo>
+                    <a:pt x="6446027" y="2420772"/>
+                  </a:lnTo>
+                  <a:lnTo>
+                    <a:pt x="6517649" y="2420565"/>
+                  </a:lnTo>
+                  <a:lnTo>
+                    <a:pt x="6589272" y="2420358"/>
+                  </a:lnTo>
+                  <a:lnTo>
+                    <a:pt x="6660894" y="2420151"/>
+                  </a:lnTo>
+                  <a:lnTo>
+                    <a:pt x="6732517" y="2419943"/>
+                  </a:lnTo>
+                  <a:lnTo>
+                    <a:pt x="6804139" y="2419736"/>
+                  </a:lnTo>
+                  <a:lnTo>
+                    <a:pt x="6875762" y="2419529"/>
+                  </a:lnTo>
+                  <a:lnTo>
+                    <a:pt x="6947385" y="2419321"/>
+                  </a:lnTo>
+                  <a:lnTo>
+                    <a:pt x="7019007" y="2419114"/>
+                  </a:lnTo>
+                  <a:lnTo>
+                    <a:pt x="7090630" y="2418907"/>
                   </a:lnTo>
                 </a:path>
               </a:pathLst>
@@ -3958,312 +3958,312 @@
           </p:nvSpPr>
           <p:spPr>
             <a:xfrm>
-              <a:off x="1172049" y="4727792"/>
-              <a:ext cx="7090630" cy="701167"/>
+              <a:off x="1172049" y="4727962"/>
+              <a:ext cx="7090630" cy="701239"/>
             </a:xfrm>
             <a:custGeom>
               <a:avLst/>
               <a:pathLst>
-                <a:path w="7090630" h="701167">
+                <a:path w="7090630" h="701239">
                   <a:moveTo>
-                    <a:pt x="7090630" y="701167"/>
+                    <a:pt x="7090630" y="701239"/>
                   </a:moveTo>
                   <a:lnTo>
-                    <a:pt x="7019007" y="696913"/>
-                  </a:lnTo>
-                  <a:lnTo>
-                    <a:pt x="6947385" y="692518"/>
-                  </a:lnTo>
-                  <a:lnTo>
-                    <a:pt x="6875762" y="687977"/>
-                  </a:lnTo>
-                  <a:lnTo>
-                    <a:pt x="6804139" y="683285"/>
-                  </a:lnTo>
-                  <a:lnTo>
-                    <a:pt x="6732517" y="678438"/>
-                  </a:lnTo>
-                  <a:lnTo>
-                    <a:pt x="6660894" y="673430"/>
-                  </a:lnTo>
-                  <a:lnTo>
-                    <a:pt x="6589272" y="668256"/>
-                  </a:lnTo>
-                  <a:lnTo>
-                    <a:pt x="6517649" y="662910"/>
-                  </a:lnTo>
-                  <a:lnTo>
-                    <a:pt x="6446027" y="657387"/>
-                  </a:lnTo>
-                  <a:lnTo>
-                    <a:pt x="6374404" y="651681"/>
-                  </a:lnTo>
-                  <a:lnTo>
-                    <a:pt x="6302782" y="645786"/>
-                  </a:lnTo>
-                  <a:lnTo>
-                    <a:pt x="6231159" y="639695"/>
-                  </a:lnTo>
-                  <a:lnTo>
-                    <a:pt x="6159537" y="633403"/>
-                  </a:lnTo>
-                  <a:lnTo>
-                    <a:pt x="6087914" y="626901"/>
-                  </a:lnTo>
-                  <a:lnTo>
-                    <a:pt x="6016292" y="620184"/>
-                  </a:lnTo>
-                  <a:lnTo>
-                    <a:pt x="5944669" y="613245"/>
-                  </a:lnTo>
-                  <a:lnTo>
-                    <a:pt x="5873047" y="606075"/>
-                  </a:lnTo>
-                  <a:lnTo>
-                    <a:pt x="5801424" y="598667"/>
-                  </a:lnTo>
-                  <a:lnTo>
-                    <a:pt x="5729802" y="591014"/>
-                  </a:lnTo>
-                  <a:lnTo>
-                    <a:pt x="5658179" y="583107"/>
-                  </a:lnTo>
-                  <a:lnTo>
-                    <a:pt x="5586557" y="574938"/>
-                  </a:lnTo>
-                  <a:lnTo>
-                    <a:pt x="5514934" y="566497"/>
-                  </a:lnTo>
-                  <a:lnTo>
-                    <a:pt x="5443311" y="557777"/>
-                  </a:lnTo>
-                  <a:lnTo>
-                    <a:pt x="5371689" y="548768"/>
-                  </a:lnTo>
-                  <a:lnTo>
-                    <a:pt x="5300066" y="539460"/>
-                  </a:lnTo>
-                  <a:lnTo>
-                    <a:pt x="5228444" y="529844"/>
-                  </a:lnTo>
-                  <a:lnTo>
-                    <a:pt x="5156821" y="519908"/>
-                  </a:lnTo>
-                  <a:lnTo>
-                    <a:pt x="5085199" y="509643"/>
-                  </a:lnTo>
-                  <a:lnTo>
-                    <a:pt x="5013576" y="499038"/>
-                  </a:lnTo>
-                  <a:lnTo>
-                    <a:pt x="4941954" y="488081"/>
-                  </a:lnTo>
-                  <a:lnTo>
-                    <a:pt x="4870331" y="476760"/>
-                  </a:lnTo>
-                  <a:lnTo>
-                    <a:pt x="4798709" y="465064"/>
-                  </a:lnTo>
-                  <a:lnTo>
-                    <a:pt x="4727086" y="452981"/>
-                  </a:lnTo>
-                  <a:lnTo>
-                    <a:pt x="4655464" y="440496"/>
-                  </a:lnTo>
-                  <a:lnTo>
-                    <a:pt x="4583841" y="427598"/>
-                  </a:lnTo>
-                  <a:lnTo>
-                    <a:pt x="4512219" y="414272"/>
-                  </a:lnTo>
-                  <a:lnTo>
-                    <a:pt x="4440596" y="400504"/>
-                  </a:lnTo>
-                  <a:lnTo>
-                    <a:pt x="4368974" y="386279"/>
-                  </a:lnTo>
-                  <a:lnTo>
-                    <a:pt x="4297351" y="371583"/>
-                  </a:lnTo>
-                  <a:lnTo>
-                    <a:pt x="4225729" y="356399"/>
-                  </a:lnTo>
-                  <a:lnTo>
-                    <a:pt x="4154106" y="340712"/>
-                  </a:lnTo>
-                  <a:lnTo>
-                    <a:pt x="4082483" y="324504"/>
-                  </a:lnTo>
-                  <a:lnTo>
-                    <a:pt x="4010861" y="307760"/>
-                  </a:lnTo>
-                  <a:lnTo>
-                    <a:pt x="3939238" y="290459"/>
-                  </a:lnTo>
-                  <a:lnTo>
-                    <a:pt x="3867616" y="272586"/>
-                  </a:lnTo>
-                  <a:lnTo>
-                    <a:pt x="3795993" y="254119"/>
-                  </a:lnTo>
-                  <a:lnTo>
-                    <a:pt x="3724371" y="235040"/>
-                  </a:lnTo>
-                  <a:lnTo>
-                    <a:pt x="3652748" y="215329"/>
-                  </a:lnTo>
-                  <a:lnTo>
-                    <a:pt x="3581126" y="194963"/>
-                  </a:lnTo>
-                  <a:lnTo>
-                    <a:pt x="3509503" y="173923"/>
-                  </a:lnTo>
-                  <a:lnTo>
-                    <a:pt x="3437881" y="152185"/>
-                  </a:lnTo>
-                  <a:lnTo>
-                    <a:pt x="3366258" y="129725"/>
-                  </a:lnTo>
-                  <a:lnTo>
-                    <a:pt x="3294636" y="106521"/>
-                  </a:lnTo>
-                  <a:lnTo>
-                    <a:pt x="3223013" y="82548"/>
-                  </a:lnTo>
-                  <a:lnTo>
-                    <a:pt x="3151391" y="57780"/>
-                  </a:lnTo>
-                  <a:lnTo>
-                    <a:pt x="3079768" y="32190"/>
-                  </a:lnTo>
-                  <a:lnTo>
-                    <a:pt x="3008146" y="5752"/>
+                    <a:pt x="7019007" y="696983"/>
+                  </a:lnTo>
+                  <a:lnTo>
+                    <a:pt x="6947385" y="692585"/>
+                  </a:lnTo>
+                  <a:lnTo>
+                    <a:pt x="6875762" y="688041"/>
+                  </a:lnTo>
+                  <a:lnTo>
+                    <a:pt x="6804139" y="683347"/>
+                  </a:lnTo>
+                  <a:lnTo>
+                    <a:pt x="6732517" y="678496"/>
+                  </a:lnTo>
+                  <a:lnTo>
+                    <a:pt x="6660894" y="673484"/>
+                  </a:lnTo>
+                  <a:lnTo>
+                    <a:pt x="6589272" y="668305"/>
+                  </a:lnTo>
+                  <a:lnTo>
+                    <a:pt x="6517649" y="662954"/>
+                  </a:lnTo>
+                  <a:lnTo>
+                    <a:pt x="6446027" y="657425"/>
+                  </a:lnTo>
+                  <a:lnTo>
+                    <a:pt x="6374404" y="651713"/>
+                  </a:lnTo>
+                  <a:lnTo>
+                    <a:pt x="6302782" y="645811"/>
+                  </a:lnTo>
+                  <a:lnTo>
+                    <a:pt x="6231159" y="639712"/>
+                  </a:lnTo>
+                  <a:lnTo>
+                    <a:pt x="6159537" y="633411"/>
+                  </a:lnTo>
+                  <a:lnTo>
+                    <a:pt x="6087914" y="626900"/>
+                  </a:lnTo>
+                  <a:lnTo>
+                    <a:pt x="6016292" y="620173"/>
+                  </a:lnTo>
+                  <a:lnTo>
+                    <a:pt x="5944669" y="613222"/>
+                  </a:lnTo>
+                  <a:lnTo>
+                    <a:pt x="5873047" y="606041"/>
+                  </a:lnTo>
+                  <a:lnTo>
+                    <a:pt x="5801424" y="598620"/>
+                  </a:lnTo>
+                  <a:lnTo>
+                    <a:pt x="5729802" y="590953"/>
+                  </a:lnTo>
+                  <a:lnTo>
+                    <a:pt x="5658179" y="583031"/>
+                  </a:lnTo>
+                  <a:lnTo>
+                    <a:pt x="5586557" y="574846"/>
+                  </a:lnTo>
+                  <a:lnTo>
+                    <a:pt x="5514934" y="566389"/>
+                  </a:lnTo>
+                  <a:lnTo>
+                    <a:pt x="5443311" y="557651"/>
+                  </a:lnTo>
+                  <a:lnTo>
+                    <a:pt x="5371689" y="548622"/>
+                  </a:lnTo>
+                  <a:lnTo>
+                    <a:pt x="5300066" y="539293"/>
+                  </a:lnTo>
+                  <a:lnTo>
+                    <a:pt x="5228444" y="529654"/>
+                  </a:lnTo>
+                  <a:lnTo>
+                    <a:pt x="5156821" y="519694"/>
+                  </a:lnTo>
+                  <a:lnTo>
+                    <a:pt x="5085199" y="509404"/>
+                  </a:lnTo>
+                  <a:lnTo>
+                    <a:pt x="5013576" y="498771"/>
+                  </a:lnTo>
+                  <a:lnTo>
+                    <a:pt x="4941954" y="487786"/>
+                  </a:lnTo>
+                  <a:lnTo>
+                    <a:pt x="4870331" y="476435"/>
+                  </a:lnTo>
+                  <a:lnTo>
+                    <a:pt x="4798709" y="464706"/>
+                  </a:lnTo>
+                  <a:lnTo>
+                    <a:pt x="4727086" y="452588"/>
+                  </a:lnTo>
+                  <a:lnTo>
+                    <a:pt x="4655464" y="440067"/>
+                  </a:lnTo>
+                  <a:lnTo>
+                    <a:pt x="4583841" y="427130"/>
+                  </a:lnTo>
+                  <a:lnTo>
+                    <a:pt x="4512219" y="413763"/>
+                  </a:lnTo>
+                  <a:lnTo>
+                    <a:pt x="4440596" y="399951"/>
+                  </a:lnTo>
+                  <a:lnTo>
+                    <a:pt x="4368974" y="385681"/>
+                  </a:lnTo>
+                  <a:lnTo>
+                    <a:pt x="4297351" y="370936"/>
+                  </a:lnTo>
+                  <a:lnTo>
+                    <a:pt x="4225729" y="355701"/>
+                  </a:lnTo>
+                  <a:lnTo>
+                    <a:pt x="4154106" y="339960"/>
+                  </a:lnTo>
+                  <a:lnTo>
+                    <a:pt x="4082483" y="323695"/>
+                  </a:lnTo>
+                  <a:lnTo>
+                    <a:pt x="4010861" y="306890"/>
+                  </a:lnTo>
+                  <a:lnTo>
+                    <a:pt x="3939238" y="289526"/>
+                  </a:lnTo>
+                  <a:lnTo>
+                    <a:pt x="3867616" y="271585"/>
+                  </a:lnTo>
+                  <a:lnTo>
+                    <a:pt x="3795993" y="253048"/>
+                  </a:lnTo>
+                  <a:lnTo>
+                    <a:pt x="3724371" y="233894"/>
+                  </a:lnTo>
+                  <a:lnTo>
+                    <a:pt x="3652748" y="214104"/>
+                  </a:lnTo>
+                  <a:lnTo>
+                    <a:pt x="3581126" y="193657"/>
+                  </a:lnTo>
+                  <a:lnTo>
+                    <a:pt x="3509503" y="172529"/>
+                  </a:lnTo>
+                  <a:lnTo>
+                    <a:pt x="3437881" y="150699"/>
+                  </a:lnTo>
+                  <a:lnTo>
+                    <a:pt x="3366258" y="128144"/>
+                  </a:lnTo>
+                  <a:lnTo>
+                    <a:pt x="3294636" y="104839"/>
+                  </a:lnTo>
+                  <a:lnTo>
+                    <a:pt x="3223013" y="80759"/>
+                  </a:lnTo>
+                  <a:lnTo>
+                    <a:pt x="3151391" y="55879"/>
+                  </a:lnTo>
+                  <a:lnTo>
+                    <a:pt x="3079768" y="30172"/>
+                  </a:lnTo>
+                  <a:lnTo>
+                    <a:pt x="3008146" y="3611"/>
                   </a:lnTo>
                   <a:lnTo>
                     <a:pt x="2936523" y="0"/>
                   </a:lnTo>
                   <a:lnTo>
-                    <a:pt x="2864901" y="7"/>
-                  </a:lnTo>
-                  <a:lnTo>
-                    <a:pt x="2793278" y="15"/>
-                  </a:lnTo>
-                  <a:lnTo>
-                    <a:pt x="2721655" y="23"/>
-                  </a:lnTo>
-                  <a:lnTo>
-                    <a:pt x="2650033" y="31"/>
-                  </a:lnTo>
-                  <a:lnTo>
-                    <a:pt x="2578410" y="39"/>
-                  </a:lnTo>
-                  <a:lnTo>
-                    <a:pt x="2506788" y="47"/>
-                  </a:lnTo>
-                  <a:lnTo>
-                    <a:pt x="2435165" y="54"/>
-                  </a:lnTo>
-                  <a:lnTo>
-                    <a:pt x="2363543" y="62"/>
-                  </a:lnTo>
-                  <a:lnTo>
-                    <a:pt x="2291920" y="70"/>
-                  </a:lnTo>
-                  <a:lnTo>
-                    <a:pt x="2220298" y="78"/>
-                  </a:lnTo>
-                  <a:lnTo>
-                    <a:pt x="2148675" y="86"/>
-                  </a:lnTo>
-                  <a:lnTo>
-                    <a:pt x="2077053" y="94"/>
-                  </a:lnTo>
-                  <a:lnTo>
-                    <a:pt x="2005430" y="102"/>
-                  </a:lnTo>
-                  <a:lnTo>
-                    <a:pt x="1933808" y="109"/>
-                  </a:lnTo>
-                  <a:lnTo>
-                    <a:pt x="1862185" y="117"/>
-                  </a:lnTo>
-                  <a:lnTo>
-                    <a:pt x="1790563" y="125"/>
-                  </a:lnTo>
-                  <a:lnTo>
-                    <a:pt x="1718940" y="133"/>
-                  </a:lnTo>
-                  <a:lnTo>
-                    <a:pt x="1647318" y="141"/>
-                  </a:lnTo>
-                  <a:lnTo>
-                    <a:pt x="1575695" y="149"/>
-                  </a:lnTo>
-                  <a:lnTo>
-                    <a:pt x="1504073" y="156"/>
-                  </a:lnTo>
-                  <a:lnTo>
-                    <a:pt x="1432450" y="164"/>
-                  </a:lnTo>
-                  <a:lnTo>
-                    <a:pt x="1360827" y="172"/>
-                  </a:lnTo>
-                  <a:lnTo>
-                    <a:pt x="1289205" y="180"/>
-                  </a:lnTo>
-                  <a:lnTo>
-                    <a:pt x="1217582" y="188"/>
-                  </a:lnTo>
-                  <a:lnTo>
-                    <a:pt x="1145960" y="196"/>
-                  </a:lnTo>
-                  <a:lnTo>
-                    <a:pt x="1074337" y="204"/>
-                  </a:lnTo>
-                  <a:lnTo>
-                    <a:pt x="1002715" y="211"/>
-                  </a:lnTo>
-                  <a:lnTo>
-                    <a:pt x="931092" y="219"/>
-                  </a:lnTo>
-                  <a:lnTo>
-                    <a:pt x="859470" y="227"/>
-                  </a:lnTo>
-                  <a:lnTo>
-                    <a:pt x="787847" y="235"/>
-                  </a:lnTo>
-                  <a:lnTo>
-                    <a:pt x="716225" y="243"/>
-                  </a:lnTo>
-                  <a:lnTo>
-                    <a:pt x="644602" y="251"/>
-                  </a:lnTo>
-                  <a:lnTo>
-                    <a:pt x="572980" y="259"/>
-                  </a:lnTo>
-                  <a:lnTo>
-                    <a:pt x="501357" y="266"/>
-                  </a:lnTo>
-                  <a:lnTo>
-                    <a:pt x="429735" y="274"/>
-                  </a:lnTo>
-                  <a:lnTo>
-                    <a:pt x="358112" y="282"/>
-                  </a:lnTo>
-                  <a:lnTo>
-                    <a:pt x="286490" y="290"/>
-                  </a:lnTo>
-                  <a:lnTo>
-                    <a:pt x="214867" y="298"/>
-                  </a:lnTo>
-                  <a:lnTo>
-                    <a:pt x="143245" y="306"/>
-                  </a:lnTo>
-                  <a:lnTo>
-                    <a:pt x="71622" y="313"/>
-                  </a:lnTo>
-                  <a:lnTo>
-                    <a:pt x="0" y="321"/>
+                    <a:pt x="2864901" y="204"/>
+                  </a:lnTo>
+                  <a:lnTo>
+                    <a:pt x="2793278" y="408"/>
+                  </a:lnTo>
+                  <a:lnTo>
+                    <a:pt x="2721655" y="613"/>
+                  </a:lnTo>
+                  <a:lnTo>
+                    <a:pt x="2650033" y="817"/>
+                  </a:lnTo>
+                  <a:lnTo>
+                    <a:pt x="2578410" y="1021"/>
+                  </a:lnTo>
+                  <a:lnTo>
+                    <a:pt x="2506788" y="1226"/>
+                  </a:lnTo>
+                  <a:lnTo>
+                    <a:pt x="2435165" y="1430"/>
+                  </a:lnTo>
+                  <a:lnTo>
+                    <a:pt x="2363543" y="1634"/>
+                  </a:lnTo>
+                  <a:lnTo>
+                    <a:pt x="2291920" y="1838"/>
+                  </a:lnTo>
+                  <a:lnTo>
+                    <a:pt x="2220298" y="2042"/>
+                  </a:lnTo>
+                  <a:lnTo>
+                    <a:pt x="2148675" y="2246"/>
+                  </a:lnTo>
+                  <a:lnTo>
+                    <a:pt x="2077053" y="2450"/>
+                  </a:lnTo>
+                  <a:lnTo>
+                    <a:pt x="2005430" y="2654"/>
+                  </a:lnTo>
+                  <a:lnTo>
+                    <a:pt x="1933808" y="2858"/>
+                  </a:lnTo>
+                  <a:lnTo>
+                    <a:pt x="1862185" y="3062"/>
+                  </a:lnTo>
+                  <a:lnTo>
+                    <a:pt x="1790563" y="3265"/>
+                  </a:lnTo>
+                  <a:lnTo>
+                    <a:pt x="1718940" y="3469"/>
+                  </a:lnTo>
+                  <a:lnTo>
+                    <a:pt x="1647318" y="3673"/>
+                  </a:lnTo>
+                  <a:lnTo>
+                    <a:pt x="1575695" y="3876"/>
+                  </a:lnTo>
+                  <a:lnTo>
+                    <a:pt x="1504073" y="4080"/>
+                  </a:lnTo>
+                  <a:lnTo>
+                    <a:pt x="1432450" y="4283"/>
+                  </a:lnTo>
+                  <a:lnTo>
+                    <a:pt x="1360827" y="4487"/>
+                  </a:lnTo>
+                  <a:lnTo>
+                    <a:pt x="1289205" y="4690"/>
+                  </a:lnTo>
+                  <a:lnTo>
+                    <a:pt x="1217582" y="4894"/>
+                  </a:lnTo>
+                  <a:lnTo>
+                    <a:pt x="1145960" y="5097"/>
+                  </a:lnTo>
+                  <a:lnTo>
+                    <a:pt x="1074337" y="5300"/>
+                  </a:lnTo>
+                  <a:lnTo>
+                    <a:pt x="1002715" y="5503"/>
+                  </a:lnTo>
+                  <a:lnTo>
+                    <a:pt x="931092" y="5706"/>
+                  </a:lnTo>
+                  <a:lnTo>
+                    <a:pt x="859470" y="5910"/>
+                  </a:lnTo>
+                  <a:lnTo>
+                    <a:pt x="787847" y="6113"/>
+                  </a:lnTo>
+                  <a:lnTo>
+                    <a:pt x="716225" y="6316"/>
+                  </a:lnTo>
+                  <a:lnTo>
+                    <a:pt x="644602" y="6518"/>
+                  </a:lnTo>
+                  <a:lnTo>
+                    <a:pt x="572980" y="6721"/>
+                  </a:lnTo>
+                  <a:lnTo>
+                    <a:pt x="501357" y="6924"/>
+                  </a:lnTo>
+                  <a:lnTo>
+                    <a:pt x="429735" y="7127"/>
+                  </a:lnTo>
+                  <a:lnTo>
+                    <a:pt x="358112" y="7330"/>
+                  </a:lnTo>
+                  <a:lnTo>
+                    <a:pt x="286490" y="7532"/>
+                  </a:lnTo>
+                  <a:lnTo>
+                    <a:pt x="214867" y="7735"/>
+                  </a:lnTo>
+                  <a:lnTo>
+                    <a:pt x="143245" y="7938"/>
+                  </a:lnTo>
+                  <a:lnTo>
+                    <a:pt x="71622" y="8140"/>
+                  </a:lnTo>
+                  <a:lnTo>
+                    <a:pt x="0" y="8343"/>
                   </a:lnTo>
                 </a:path>
               </a:pathLst>
@@ -4283,312 +4283,312 @@
           </p:nvSpPr>
           <p:spPr>
             <a:xfrm>
-              <a:off x="1172049" y="3917685"/>
-              <a:ext cx="7090630" cy="1313268"/>
+              <a:off x="1172049" y="3921280"/>
+              <a:ext cx="7090630" cy="1307764"/>
             </a:xfrm>
             <a:custGeom>
               <a:avLst/>
               <a:pathLst>
-                <a:path w="7090630" h="1313268">
+                <a:path w="7090630" h="1307764">
                   <a:moveTo>
                     <a:pt x="0" y="0"/>
                   </a:moveTo>
                   <a:lnTo>
-                    <a:pt x="71622" y="26519"/>
-                  </a:lnTo>
-                  <a:lnTo>
-                    <a:pt x="143245" y="52609"/>
-                  </a:lnTo>
-                  <a:lnTo>
-                    <a:pt x="214867" y="78278"/>
-                  </a:lnTo>
-                  <a:lnTo>
-                    <a:pt x="286490" y="103531"/>
-                  </a:lnTo>
-                  <a:lnTo>
-                    <a:pt x="358112" y="128376"/>
-                  </a:lnTo>
-                  <a:lnTo>
-                    <a:pt x="429735" y="152819"/>
-                  </a:lnTo>
-                  <a:lnTo>
-                    <a:pt x="501357" y="176866"/>
-                  </a:lnTo>
-                  <a:lnTo>
-                    <a:pt x="572980" y="200525"/>
-                  </a:lnTo>
-                  <a:lnTo>
-                    <a:pt x="644602" y="223801"/>
-                  </a:lnTo>
-                  <a:lnTo>
-                    <a:pt x="716225" y="246700"/>
-                  </a:lnTo>
-                  <a:lnTo>
-                    <a:pt x="787847" y="269229"/>
-                  </a:lnTo>
-                  <a:lnTo>
-                    <a:pt x="859470" y="291394"/>
-                  </a:lnTo>
-                  <a:lnTo>
-                    <a:pt x="931092" y="313200"/>
-                  </a:lnTo>
-                  <a:lnTo>
-                    <a:pt x="1002715" y="334654"/>
-                  </a:lnTo>
-                  <a:lnTo>
-                    <a:pt x="1074337" y="355760"/>
-                  </a:lnTo>
-                  <a:lnTo>
-                    <a:pt x="1145960" y="376525"/>
-                  </a:lnTo>
-                  <a:lnTo>
-                    <a:pt x="1217582" y="396954"/>
-                  </a:lnTo>
-                  <a:lnTo>
-                    <a:pt x="1289205" y="417053"/>
-                  </a:lnTo>
-                  <a:lnTo>
-                    <a:pt x="1360827" y="436827"/>
-                  </a:lnTo>
-                  <a:lnTo>
-                    <a:pt x="1432450" y="456281"/>
-                  </a:lnTo>
-                  <a:lnTo>
-                    <a:pt x="1504073" y="475420"/>
-                  </a:lnTo>
-                  <a:lnTo>
-                    <a:pt x="1575695" y="494250"/>
-                  </a:lnTo>
-                  <a:lnTo>
-                    <a:pt x="1647318" y="512775"/>
-                  </a:lnTo>
-                  <a:lnTo>
-                    <a:pt x="1718940" y="531000"/>
-                  </a:lnTo>
-                  <a:lnTo>
-                    <a:pt x="1790563" y="548931"/>
-                  </a:lnTo>
-                  <a:lnTo>
-                    <a:pt x="1862185" y="566571"/>
-                  </a:lnTo>
-                  <a:lnTo>
-                    <a:pt x="1933808" y="583927"/>
-                  </a:lnTo>
-                  <a:lnTo>
-                    <a:pt x="2005430" y="601001"/>
-                  </a:lnTo>
-                  <a:lnTo>
-                    <a:pt x="2077053" y="617800"/>
-                  </a:lnTo>
-                  <a:lnTo>
-                    <a:pt x="2148675" y="634326"/>
-                  </a:lnTo>
-                  <a:lnTo>
-                    <a:pt x="2220298" y="650586"/>
-                  </a:lnTo>
-                  <a:lnTo>
-                    <a:pt x="2291920" y="666582"/>
-                  </a:lnTo>
-                  <a:lnTo>
-                    <a:pt x="2363543" y="682320"/>
-                  </a:lnTo>
-                  <a:lnTo>
-                    <a:pt x="2435165" y="697803"/>
-                  </a:lnTo>
-                  <a:lnTo>
-                    <a:pt x="2506788" y="713035"/>
-                  </a:lnTo>
-                  <a:lnTo>
-                    <a:pt x="2578410" y="728022"/>
-                  </a:lnTo>
-                  <a:lnTo>
-                    <a:pt x="2650033" y="742766"/>
-                  </a:lnTo>
-                  <a:lnTo>
-                    <a:pt x="2721655" y="757271"/>
-                  </a:lnTo>
-                  <a:lnTo>
-                    <a:pt x="2793278" y="771542"/>
-                  </a:lnTo>
-                  <a:lnTo>
-                    <a:pt x="2864901" y="785582"/>
-                  </a:lnTo>
-                  <a:lnTo>
-                    <a:pt x="2936523" y="799395"/>
-                  </a:lnTo>
-                  <a:lnTo>
-                    <a:pt x="3008146" y="812984"/>
-                  </a:lnTo>
-                  <a:lnTo>
-                    <a:pt x="3079768" y="826354"/>
-                  </a:lnTo>
-                  <a:lnTo>
-                    <a:pt x="3151391" y="839507"/>
-                  </a:lnTo>
-                  <a:lnTo>
-                    <a:pt x="3223013" y="852448"/>
-                  </a:lnTo>
-                  <a:lnTo>
-                    <a:pt x="3294636" y="865179"/>
-                  </a:lnTo>
-                  <a:lnTo>
-                    <a:pt x="3366258" y="877704"/>
-                  </a:lnTo>
-                  <a:lnTo>
-                    <a:pt x="3437881" y="890027"/>
-                  </a:lnTo>
-                  <a:lnTo>
-                    <a:pt x="3509503" y="902151"/>
-                  </a:lnTo>
-                  <a:lnTo>
-                    <a:pt x="3581126" y="914078"/>
-                  </a:lnTo>
-                  <a:lnTo>
-                    <a:pt x="3652748" y="925813"/>
-                  </a:lnTo>
-                  <a:lnTo>
-                    <a:pt x="3724371" y="937357"/>
-                  </a:lnTo>
-                  <a:lnTo>
-                    <a:pt x="3795993" y="948715"/>
-                  </a:lnTo>
-                  <a:lnTo>
-                    <a:pt x="3867616" y="959889"/>
-                  </a:lnTo>
-                  <a:lnTo>
-                    <a:pt x="3939238" y="970883"/>
-                  </a:lnTo>
-                  <a:lnTo>
-                    <a:pt x="4010861" y="981699"/>
-                  </a:lnTo>
-                  <a:lnTo>
-                    <a:pt x="4082483" y="992339"/>
-                  </a:lnTo>
-                  <a:lnTo>
-                    <a:pt x="4154106" y="1002808"/>
-                  </a:lnTo>
-                  <a:lnTo>
-                    <a:pt x="4225729" y="1013107"/>
-                  </a:lnTo>
-                  <a:lnTo>
-                    <a:pt x="4297351" y="1023240"/>
-                  </a:lnTo>
-                  <a:lnTo>
-                    <a:pt x="4368974" y="1033209"/>
-                  </a:lnTo>
-                  <a:lnTo>
-                    <a:pt x="4440596" y="1043016"/>
-                  </a:lnTo>
-                  <a:lnTo>
-                    <a:pt x="4512219" y="1052665"/>
-                  </a:lnTo>
-                  <a:lnTo>
-                    <a:pt x="4583841" y="1062158"/>
-                  </a:lnTo>
-                  <a:lnTo>
-                    <a:pt x="4655464" y="1071498"/>
-                  </a:lnTo>
-                  <a:lnTo>
-                    <a:pt x="4727086" y="1080686"/>
-                  </a:lnTo>
-                  <a:lnTo>
-                    <a:pt x="4798709" y="1089726"/>
-                  </a:lnTo>
-                  <a:lnTo>
-                    <a:pt x="4870331" y="1098619"/>
-                  </a:lnTo>
-                  <a:lnTo>
-                    <a:pt x="4941954" y="1107369"/>
-                  </a:lnTo>
-                  <a:lnTo>
-                    <a:pt x="5013576" y="1115977"/>
-                  </a:lnTo>
-                  <a:lnTo>
-                    <a:pt x="5085199" y="1124445"/>
-                  </a:lnTo>
-                  <a:lnTo>
-                    <a:pt x="5156821" y="1132777"/>
-                  </a:lnTo>
-                  <a:lnTo>
-                    <a:pt x="5228444" y="1140974"/>
-                  </a:lnTo>
-                  <a:lnTo>
-                    <a:pt x="5300066" y="1149039"/>
-                  </a:lnTo>
-                  <a:lnTo>
-                    <a:pt x="5371689" y="1156973"/>
-                  </a:lnTo>
-                  <a:lnTo>
-                    <a:pt x="5443311" y="1164779"/>
-                  </a:lnTo>
-                  <a:lnTo>
-                    <a:pt x="5514934" y="1172458"/>
-                  </a:lnTo>
-                  <a:lnTo>
-                    <a:pt x="5586557" y="1180014"/>
-                  </a:lnTo>
-                  <a:lnTo>
-                    <a:pt x="5658179" y="1187447"/>
-                  </a:lnTo>
-                  <a:lnTo>
-                    <a:pt x="5729802" y="1194759"/>
-                  </a:lnTo>
-                  <a:lnTo>
-                    <a:pt x="5801424" y="1201954"/>
-                  </a:lnTo>
-                  <a:lnTo>
-                    <a:pt x="5873047" y="1209032"/>
-                  </a:lnTo>
-                  <a:lnTo>
-                    <a:pt x="5944669" y="1215996"/>
-                  </a:lnTo>
-                  <a:lnTo>
-                    <a:pt x="6016292" y="1222847"/>
-                  </a:lnTo>
-                  <a:lnTo>
-                    <a:pt x="6087914" y="1229587"/>
-                  </a:lnTo>
-                  <a:lnTo>
-                    <a:pt x="6159537" y="1236218"/>
-                  </a:lnTo>
-                  <a:lnTo>
-                    <a:pt x="6231159" y="1242742"/>
-                  </a:lnTo>
-                  <a:lnTo>
-                    <a:pt x="6302782" y="1249161"/>
-                  </a:lnTo>
-                  <a:lnTo>
-                    <a:pt x="6374404" y="1255476"/>
-                  </a:lnTo>
-                  <a:lnTo>
-                    <a:pt x="6446027" y="1261688"/>
-                  </a:lnTo>
-                  <a:lnTo>
-                    <a:pt x="6517649" y="1267800"/>
-                  </a:lnTo>
-                  <a:lnTo>
-                    <a:pt x="6589272" y="1273813"/>
-                  </a:lnTo>
-                  <a:lnTo>
-                    <a:pt x="6660894" y="1279729"/>
-                  </a:lnTo>
-                  <a:lnTo>
-                    <a:pt x="6732517" y="1285549"/>
-                  </a:lnTo>
-                  <a:lnTo>
-                    <a:pt x="6804139" y="1291275"/>
-                  </a:lnTo>
-                  <a:lnTo>
-                    <a:pt x="6875762" y="1296909"/>
-                  </a:lnTo>
-                  <a:lnTo>
-                    <a:pt x="6947385" y="1302451"/>
-                  </a:lnTo>
-                  <a:lnTo>
-                    <a:pt x="7019007" y="1307904"/>
-                  </a:lnTo>
-                  <a:lnTo>
-                    <a:pt x="7090630" y="1313268"/>
+                    <a:pt x="71622" y="26330"/>
+                  </a:lnTo>
+                  <a:lnTo>
+                    <a:pt x="143245" y="52237"/>
+                  </a:lnTo>
+                  <a:lnTo>
+                    <a:pt x="214867" y="77727"/>
+                  </a:lnTo>
+                  <a:lnTo>
+                    <a:pt x="286490" y="102807"/>
+                  </a:lnTo>
+                  <a:lnTo>
+                    <a:pt x="358112" y="127483"/>
+                  </a:lnTo>
+                  <a:lnTo>
+                    <a:pt x="429735" y="151762"/>
+                  </a:lnTo>
+                  <a:lnTo>
+                    <a:pt x="501357" y="175650"/>
+                  </a:lnTo>
+                  <a:lnTo>
+                    <a:pt x="572980" y="199153"/>
+                  </a:lnTo>
+                  <a:lnTo>
+                    <a:pt x="644602" y="222279"/>
+                  </a:lnTo>
+                  <a:lnTo>
+                    <a:pt x="716225" y="245032"/>
+                  </a:lnTo>
+                  <a:lnTo>
+                    <a:pt x="787847" y="267419"/>
+                  </a:lnTo>
+                  <a:lnTo>
+                    <a:pt x="859470" y="289445"/>
+                  </a:lnTo>
+                  <a:lnTo>
+                    <a:pt x="931092" y="311117"/>
+                  </a:lnTo>
+                  <a:lnTo>
+                    <a:pt x="1002715" y="332441"/>
+                  </a:lnTo>
+                  <a:lnTo>
+                    <a:pt x="1074337" y="353421"/>
+                  </a:lnTo>
+                  <a:lnTo>
+                    <a:pt x="1145960" y="374063"/>
+                  </a:lnTo>
+                  <a:lnTo>
+                    <a:pt x="1217582" y="394373"/>
+                  </a:lnTo>
+                  <a:lnTo>
+                    <a:pt x="1289205" y="414357"/>
+                  </a:lnTo>
+                  <a:lnTo>
+                    <a:pt x="1360827" y="434018"/>
+                  </a:lnTo>
+                  <a:lnTo>
+                    <a:pt x="1432450" y="453363"/>
+                  </a:lnTo>
+                  <a:lnTo>
+                    <a:pt x="1504073" y="472397"/>
+                  </a:lnTo>
+                  <a:lnTo>
+                    <a:pt x="1575695" y="491125"/>
+                  </a:lnTo>
+                  <a:lnTo>
+                    <a:pt x="1647318" y="509551"/>
+                  </a:lnTo>
+                  <a:lnTo>
+                    <a:pt x="1718940" y="527680"/>
+                  </a:lnTo>
+                  <a:lnTo>
+                    <a:pt x="1790563" y="545518"/>
+                  </a:lnTo>
+                  <a:lnTo>
+                    <a:pt x="1862185" y="563069"/>
+                  </a:lnTo>
+                  <a:lnTo>
+                    <a:pt x="1933808" y="580337"/>
+                  </a:lnTo>
+                  <a:lnTo>
+                    <a:pt x="2005430" y="597327"/>
+                  </a:lnTo>
+                  <a:lnTo>
+                    <a:pt x="2077053" y="614044"/>
+                  </a:lnTo>
+                  <a:lnTo>
+                    <a:pt x="2148675" y="630492"/>
+                  </a:lnTo>
+                  <a:lnTo>
+                    <a:pt x="2220298" y="646675"/>
+                  </a:lnTo>
+                  <a:lnTo>
+                    <a:pt x="2291920" y="662597"/>
+                  </a:lnTo>
+                  <a:lnTo>
+                    <a:pt x="2363543" y="678263"/>
+                  </a:lnTo>
+                  <a:lnTo>
+                    <a:pt x="2435165" y="693678"/>
+                  </a:lnTo>
+                  <a:lnTo>
+                    <a:pt x="2506788" y="708844"/>
+                  </a:lnTo>
+                  <a:lnTo>
+                    <a:pt x="2578410" y="723766"/>
+                  </a:lnTo>
+                  <a:lnTo>
+                    <a:pt x="2650033" y="738447"/>
+                  </a:lnTo>
+                  <a:lnTo>
+                    <a:pt x="2721655" y="752893"/>
+                  </a:lnTo>
+                  <a:lnTo>
+                    <a:pt x="2793278" y="767106"/>
+                  </a:lnTo>
+                  <a:lnTo>
+                    <a:pt x="2864901" y="781090"/>
+                  </a:lnTo>
+                  <a:lnTo>
+                    <a:pt x="2936523" y="794849"/>
+                  </a:lnTo>
+                  <a:lnTo>
+                    <a:pt x="3008146" y="808387"/>
+                  </a:lnTo>
+                  <a:lnTo>
+                    <a:pt x="3079768" y="821707"/>
+                  </a:lnTo>
+                  <a:lnTo>
+                    <a:pt x="3151391" y="834812"/>
+                  </a:lnTo>
+                  <a:lnTo>
+                    <a:pt x="3223013" y="847707"/>
+                  </a:lnTo>
+                  <a:lnTo>
+                    <a:pt x="3294636" y="860393"/>
+                  </a:lnTo>
+                  <a:lnTo>
+                    <a:pt x="3366258" y="872876"/>
+                  </a:lnTo>
+                  <a:lnTo>
+                    <a:pt x="3437881" y="885158"/>
+                  </a:lnTo>
+                  <a:lnTo>
+                    <a:pt x="3509503" y="897242"/>
+                  </a:lnTo>
+                  <a:lnTo>
+                    <a:pt x="3581126" y="909132"/>
+                  </a:lnTo>
+                  <a:lnTo>
+                    <a:pt x="3652748" y="920830"/>
+                  </a:lnTo>
+                  <a:lnTo>
+                    <a:pt x="3724371" y="932340"/>
+                  </a:lnTo>
+                  <a:lnTo>
+                    <a:pt x="3795993" y="943665"/>
+                  </a:lnTo>
+                  <a:lnTo>
+                    <a:pt x="3867616" y="954808"/>
+                  </a:lnTo>
+                  <a:lnTo>
+                    <a:pt x="3939238" y="965771"/>
+                  </a:lnTo>
+                  <a:lnTo>
+                    <a:pt x="4010861" y="976558"/>
+                  </a:lnTo>
+                  <a:lnTo>
+                    <a:pt x="4082483" y="987171"/>
+                  </a:lnTo>
+                  <a:lnTo>
+                    <a:pt x="4154106" y="997613"/>
+                  </a:lnTo>
+                  <a:lnTo>
+                    <a:pt x="4225729" y="1007887"/>
+                  </a:lnTo>
+                  <a:lnTo>
+                    <a:pt x="4297351" y="1017996"/>
+                  </a:lnTo>
+                  <a:lnTo>
+                    <a:pt x="4368974" y="1027942"/>
+                  </a:lnTo>
+                  <a:lnTo>
+                    <a:pt x="4440596" y="1037728"/>
+                  </a:lnTo>
+                  <a:lnTo>
+                    <a:pt x="4512219" y="1047357"/>
+                  </a:lnTo>
+                  <a:lnTo>
+                    <a:pt x="4583841" y="1056831"/>
+                  </a:lnTo>
+                  <a:lnTo>
+                    <a:pt x="4655464" y="1066152"/>
+                  </a:lnTo>
+                  <a:lnTo>
+                    <a:pt x="4727086" y="1075323"/>
+                  </a:lnTo>
+                  <a:lnTo>
+                    <a:pt x="4798709" y="1084346"/>
+                  </a:lnTo>
+                  <a:lnTo>
+                    <a:pt x="4870331" y="1093225"/>
+                  </a:lnTo>
+                  <a:lnTo>
+                    <a:pt x="4941954" y="1101960"/>
+                  </a:lnTo>
+                  <a:lnTo>
+                    <a:pt x="5013576" y="1110555"/>
+                  </a:lnTo>
+                  <a:lnTo>
+                    <a:pt x="5085199" y="1119011"/>
+                  </a:lnTo>
+                  <a:lnTo>
+                    <a:pt x="5156821" y="1127332"/>
+                  </a:lnTo>
+                  <a:lnTo>
+                    <a:pt x="5228444" y="1135518"/>
+                  </a:lnTo>
+                  <a:lnTo>
+                    <a:pt x="5300066" y="1143573"/>
+                  </a:lnTo>
+                  <a:lnTo>
+                    <a:pt x="5371689" y="1151498"/>
+                  </a:lnTo>
+                  <a:lnTo>
+                    <a:pt x="5443311" y="1159295"/>
+                  </a:lnTo>
+                  <a:lnTo>
+                    <a:pt x="5514934" y="1166967"/>
+                  </a:lnTo>
+                  <a:lnTo>
+                    <a:pt x="5586557" y="1174516"/>
+                  </a:lnTo>
+                  <a:lnTo>
+                    <a:pt x="5658179" y="1181943"/>
+                  </a:lnTo>
+                  <a:lnTo>
+                    <a:pt x="5729802" y="1189250"/>
+                  </a:lnTo>
+                  <a:lnTo>
+                    <a:pt x="5801424" y="1196440"/>
+                  </a:lnTo>
+                  <a:lnTo>
+                    <a:pt x="5873047" y="1203514"/>
+                  </a:lnTo>
+                  <a:lnTo>
+                    <a:pt x="5944669" y="1210475"/>
+                  </a:lnTo>
+                  <a:lnTo>
+                    <a:pt x="6016292" y="1217323"/>
+                  </a:lnTo>
+                  <a:lnTo>
+                    <a:pt x="6087914" y="1224061"/>
+                  </a:lnTo>
+                  <a:lnTo>
+                    <a:pt x="6159537" y="1230690"/>
+                  </a:lnTo>
+                  <a:lnTo>
+                    <a:pt x="6231159" y="1237213"/>
+                  </a:lnTo>
+                  <a:lnTo>
+                    <a:pt x="6302782" y="1243631"/>
+                  </a:lnTo>
+                  <a:lnTo>
+                    <a:pt x="6374404" y="1249946"/>
+                  </a:lnTo>
+                  <a:lnTo>
+                    <a:pt x="6446027" y="1256159"/>
+                  </a:lnTo>
+                  <a:lnTo>
+                    <a:pt x="6517649" y="1262272"/>
+                  </a:lnTo>
+                  <a:lnTo>
+                    <a:pt x="6589272" y="1268286"/>
+                  </a:lnTo>
+                  <a:lnTo>
+                    <a:pt x="6660894" y="1274204"/>
+                  </a:lnTo>
+                  <a:lnTo>
+                    <a:pt x="6732517" y="1280027"/>
+                  </a:lnTo>
+                  <a:lnTo>
+                    <a:pt x="6804139" y="1285756"/>
+                  </a:lnTo>
+                  <a:lnTo>
+                    <a:pt x="6875762" y="1291392"/>
+                  </a:lnTo>
+                  <a:lnTo>
+                    <a:pt x="6947385" y="1296938"/>
+                  </a:lnTo>
+                  <a:lnTo>
+                    <a:pt x="7019007" y="1302395"/>
+                  </a:lnTo>
+                  <a:lnTo>
+                    <a:pt x="7090630" y="1307764"/>
                   </a:lnTo>
                 </a:path>
               </a:pathLst>
@@ -4660,7 +4660,7 @@
           </p:nvSpPr>
           <p:spPr>
             <a:xfrm>
-              <a:off x="4164901" y="2073503"/>
+              <a:off x="4170171" y="2073503"/>
               <a:ext cx="0" cy="3649639"/>
             </a:xfrm>
             <a:custGeom>
@@ -4933,7 +4933,7 @@
           </p:nvSpPr>
           <p:spPr>
             <a:xfrm>
-              <a:off x="2284877" y="5785772"/>
+              <a:off x="2285456" y="5785772"/>
               <a:ext cx="161574" cy="80101"/>
             </a:xfrm>
             <a:prstGeom prst="rect">
@@ -4979,7 +4979,7 @@
           </p:nvSpPr>
           <p:spPr>
             <a:xfrm>
-              <a:off x="4138944" y="5785772"/>
+              <a:off x="4139043" y="5785772"/>
               <a:ext cx="62179" cy="80101"/>
             </a:xfrm>
             <a:prstGeom prst="rect">
@@ -5025,7 +5025,7 @@
           </p:nvSpPr>
           <p:spPr>
             <a:xfrm>
-              <a:off x="5912223" y="5785772"/>
+              <a:off x="5911843" y="5785772"/>
               <a:ext cx="124358" cy="80101"/>
             </a:xfrm>
             <a:prstGeom prst="rect">
@@ -5071,7 +5071,7 @@
           </p:nvSpPr>
           <p:spPr>
             <a:xfrm>
-              <a:off x="7716592" y="5785772"/>
+              <a:off x="7715733" y="5785772"/>
               <a:ext cx="124358" cy="80101"/>
             </a:xfrm>
             <a:prstGeom prst="rect">
@@ -5242,7 +5242,7 @@
                   <a:latin typeface="Helvetica"/>
                   <a:cs typeface="Helvetica"/>
                 </a:rPr>
-                <a:t>subHR per 10 % decline: 1.23 (1.00-1.51), p_Bonf = 0.301 (n = 6)  |  per IQR decline (Δ = 27.4 %): 1.76 (1.00-3.09)  |  IQR: [-12.6, 14.8] %</a:t>
+                <a:t>subHR per 10 % decline: 1.23 (1.00-1.51), p_Bonf = 0.321 (n = 6)  |  per IQR decline (Δ = 27.2 %): 1.74 (0.99-3.07)  |  IQR: [-12.3, 14.9] %</a:t>
               </a:r>
             </a:p>
           </p:txBody>
